--- a/deliverables/VIDEO_4_How_To_Explain_A_Career_That_Looks_All_Over_The_Place_FINAL/Recording_Support_Deck.pptx
+++ b/deliverables/VIDEO_4_How_To_Explain_A_Career_That_Looks_All_Over_The_Place_FINAL/Recording_Support_Deck.pptx
@@ -14,6 +14,7 @@
     <p:sldId id="262" r:id="rId14"/>
     <p:sldId id="263" r:id="rId15"/>
     <p:sldId id="264" r:id="rId16"/>
+    <p:sldId id="265" r:id="rId17"/>
   </p:sldIdLst>
   <p:sldSz cx="12192000" cy="6858000" type="screen4x3"/>
   <p:notesSz cx="6858000" cy="9144000"/>
@@ -510,30 +511,135 @@
           <a:lstStyle/>
           <a:p>
             <a:r>
-              <a:t>V4_MG01_Stop_Explaining_In_Order.png  (MG01)</a:t>
+              <a:t>V4_MG01_Introduction_Or_Defense.png  (MG01)</a:t>
             </a:r>
           </a:p>
           <a:p/>
           <a:p>
             <a:r>
-              <a:t>On screen: STOP EXPLAINING YOUR CAREER IN ORDER.</a:t>
+              <a:t>Status: REBUILD</a:t>
             </a:r>
           </a:p>
           <a:p/>
           <a:p>
             <a:r>
-              <a:t>Script: "So here is the rule: Stop explaining your career in order."</a:t>
+              <a:t>On screen: LESS LIKE AN INTRODUCTION. MORE LIKE A DEFENSE.</a:t>
             </a:r>
           </a:p>
           <a:p/>
           <a:p>
             <a:r>
-              <a:t>Purpose: The rule the whole video runs on, stated once at full size.</a:t>
+              <a:t>Script: Now your answer feels less like an introduction and more like a defense.</a:t>
+            </a:r>
+          </a:p>
+          <a:p/>
+          <a:p>
+            <a:r>
+              <a:t>Purpose: Names the problem the whole video solves, in the viewer's own experience, inside the first thirty seconds.</a:t>
             </a:r>
           </a:p>
           <a:p>
             <a:r>
               <a:t>Hold: 6 to 7 seconds</a:t>
+            </a:r>
+          </a:p>
+        </p:txBody>
+      </p:sp>
+      <p:sp>
+        <p:nvSpPr>
+          <p:cNvPr id="4" name="Slide Number Placeholder 3"/>
+          <p:cNvSpPr>
+            <a:spLocks noGrp="1"/>
+          </p:cNvSpPr>
+          <p:nvPr>
+            <p:ph type="sldNum" idx="5" sz="quarter"/>
+          </p:nvPr>
+        </p:nvSpPr>
+        <p:spPr/>
+      </p:sp>
+    </p:spTree>
+  </p:cSld>
+  <p:clrMapOvr>
+    <a:masterClrMapping/>
+  </p:clrMapOvr>
+</p:notes>
+</file>
+
+<file path=ppt/notesSlides/notesSlide10.xml><?xml version="1.0" encoding="utf-8"?>
+<p:notes xmlns:a="http://schemas.openxmlformats.org/drawingml/2006/main" xmlns:p="http://schemas.openxmlformats.org/presentationml/2006/main" xmlns:r="http://schemas.openxmlformats.org/officeDocument/2006/relationships">
+  <p:cSld>
+    <p:spTree>
+      <p:nvGrpSpPr>
+        <p:cNvPr id="1" name=""/>
+        <p:cNvGrpSpPr/>
+        <p:nvPr/>
+      </p:nvGrpSpPr>
+      <p:grpSpPr>
+        <a:xfrm>
+          <a:off x="0" y="0"/>
+          <a:ext cx="0" cy="0"/>
+          <a:chOff x="0" y="0"/>
+          <a:chExt cx="0" cy="0"/>
+        </a:xfrm>
+      </p:grpSpPr>
+      <p:sp>
+        <p:nvSpPr>
+          <p:cNvPr id="2" name="Slide Image Placeholder 1"/>
+          <p:cNvSpPr>
+            <a:spLocks noGrp="1"/>
+          </p:cNvSpPr>
+          <p:nvPr>
+            <p:ph type="sldImg" idx="2"/>
+          </p:nvPr>
+        </p:nvSpPr>
+        <p:spPr/>
+      </p:sp>
+      <p:sp>
+        <p:nvSpPr>
+          <p:cNvPr id="3" name="Notes Placeholder 2"/>
+          <p:cNvSpPr>
+            <a:spLocks noGrp="1"/>
+          </p:cNvSpPr>
+          <p:nvPr>
+            <p:ph type="body" idx="3" sz="quarter"/>
+          </p:nvPr>
+        </p:nvSpPr>
+        <p:spPr/>
+        <p:txBody>
+          <a:bodyPr/>
+          <a:lstStyle/>
+          <a:p>
+            <a:r>
+              <a:t>V4_WatchNext_Why_Nobody_Can_Tell.png  (WN)</a:t>
+            </a:r>
+          </a:p>
+          <a:p/>
+          <a:p>
+            <a:r>
+              <a:t>Status: REUSE</a:t>
+            </a:r>
+          </a:p>
+          <a:p/>
+          <a:p>
+            <a:r>
+              <a:t>On screen: WATCH NEXT: WHY NOBODY CAN TELL WHAT YOU'RE ACTUALLY GOOD AT</a:t>
+            </a:r>
+          </a:p>
+          <a:p/>
+          <a:p>
+            <a:r>
+              <a:t>Script: Watch “Why Nobody Can Tell What You’re Actually Good At” next.</a:t>
+            </a:r>
+          </a:p>
+          <a:p/>
+          <a:p>
+            <a:r>
+              <a:t>Purpose: Final visual. The right of frame is left clear for the clickable end-screen element.</a:t>
+            </a:r>
+          </a:p>
+          <a:p>
+            <a:r>
+              <a:t>Hold: 10 to 14 seconds, through both closing lines and past the last word.</a:t>
             </a:r>
           </a:p>
         </p:txBody>
@@ -609,19 +715,25 @@
           <a:p/>
           <a:p>
             <a:r>
+              <a:t>Status: COPY UPDATE</a:t>
+            </a:r>
+          </a:p>
+          <a:p/>
+          <a:p>
+            <a:r>
               <a:t>On screen: CHAPTERS / SPINE / NEXT DIRECTION</a:t>
             </a:r>
           </a:p>
           <a:p/>
           <a:p>
             <a:r>
-              <a:t>Script: "All three versions use the same structure underneath. Chapters. Spine. Next Direction."</a:t>
+              <a:t>Script: All three answers use the same ingredients:</a:t>
             </a:r>
           </a:p>
           <a:p/>
           <a:p>
             <a:r>
-              <a:t>Purpose: The hero framework. Returns briefly above each of the three versions.</a:t>
+              <a:t>Purpose: The hero framework, stated as ingredients rather than as a fixed running order.</a:t>
             </a:r>
           </a:p>
           <a:p>
@@ -696,30 +808,36 @@
           <a:lstStyle/>
           <a:p>
             <a:r>
-              <a:t>V4_MG03_Twenty_Second_Version.png  (MG03)</a:t>
+              <a:t>V4_MG03_Order_Depends_On_The_Question.png  (MG03)</a:t>
             </a:r>
           </a:p>
           <a:p/>
           <a:p>
             <a:r>
-              <a:t>On screen: I ...  /  I've done that in ...  /  Today I ...</a:t>
+              <a:t>Status: REBUILD</a:t>
             </a:r>
           </a:p>
           <a:p/>
           <a:p>
             <a:r>
-              <a:t>Script: "Your version is: I, and then the work pattern. I've done that in, and then two or three contexts. Today I, and then your current direction."</a:t>
+              <a:t>On screen: QUICK INTRODUCTION: lead with the Spine / LONGER ANSWER: use Chapters to make the Spine visible</a:t>
             </a:r>
           </a:p>
           <a:p/>
           <a:p>
             <a:r>
-              <a:t>Purpose: The template a viewer will pause and copy. It has to be readable in a screenshot.</a:t>
-            </a:r>
-          </a:p>
-          <a:p>
-            <a:r>
-              <a:t>Hold: 10 to 12 seconds. The longest hold in the video.</a:t>
+              <a:t>Script: For a quick introduction, I lead with the Spine.</a:t>
+            </a:r>
+          </a:p>
+          <a:p/>
+          <a:p>
+            <a:r>
+              <a:t>Purpose: Replaces the retired fixed-order rule with what the script actually teaches.</a:t>
+            </a:r>
+          </a:p>
+          <a:p>
+            <a:r>
+              <a:t>Hold: 9 to 10 seconds</a:t>
             </a:r>
           </a:p>
         </p:txBody>
@@ -789,30 +907,36 @@
           <a:lstStyle/>
           <a:p>
             <a:r>
-              <a:t>V4_MG04_Ninety_Second_Version.png  (MG04)</a:t>
+              <a:t>V4_MG04_Twenty_Second_Version.png  (MG04)</a:t>
             </a:r>
           </a:p>
           <a:p/>
           <a:p>
             <a:r>
-              <a:t>On screen: CHAPTERS / SPINE / NEXT DIRECTION</a:t>
+              <a:t>Status: REUSE</a:t>
             </a:r>
           </a:p>
           <a:p/>
           <a:p>
             <a:r>
-              <a:t>Script: "That is the ninety-second answer. Chapters. Spine. Next Direction."</a:t>
+              <a:t>On screen: I ...  /  I've done that in ...  /  Today I ...</a:t>
             </a:r>
           </a:p>
           <a:p/>
           <a:p>
             <a:r>
-              <a:t>Purpose: Shows the same structure carrying a longer answer, so the viewer sees one system rather than three tricks.</a:t>
-            </a:r>
-          </a:p>
-          <a:p>
-            <a:r>
-              <a:t>Hold: 7 to 8 seconds</a:t>
+              <a:t>Script: “I…” and then the work pattern.</a:t>
+            </a:r>
+          </a:p>
+          <a:p/>
+          <a:p>
+            <a:r>
+              <a:t>Purpose: The template a viewer will pause and screenshot.</a:t>
+            </a:r>
+          </a:p>
+          <a:p>
+            <a:r>
+              <a:t>Hold: 10 to 12 seconds. The longest hold in the video.</a:t>
             </a:r>
           </a:p>
         </p:txBody>
@@ -882,30 +1006,36 @@
           <a:lstStyle/>
           <a:p>
             <a:r>
-              <a:t>V4_MG05_The_Objection.png  (MG05)</a:t>
+              <a:t>V4_MG05_Ninety_Second_Version.png  (MG05)</a:t>
             </a:r>
           </a:p>
           <a:p/>
           <a:p>
             <a:r>
-              <a:t>On screen: WHY SO MANY CHANGES?</a:t>
+              <a:t>Status: REUSE</a:t>
             </a:r>
           </a:p>
           <a:p/>
           <a:p>
             <a:r>
-              <a:t>Script: "Now the harder one. Why so many changes?"</a:t>
+              <a:t>On screen: CHAPTERS / SPINE / NEXT DIRECTION</a:t>
             </a:r>
           </a:p>
           <a:p/>
           <a:p>
             <a:r>
-              <a:t>Purpose: Puts the actual question on screen, then reframes it before the answer is taught.</a:t>
-            </a:r>
-          </a:p>
-          <a:p>
-            <a:r>
-              <a:t>Hold: 6 to 7 seconds</a:t>
+              <a:t>Script: That is the ninety-second answer.</a:t>
+            </a:r>
+          </a:p>
+          <a:p/>
+          <a:p>
+            <a:r>
+              <a:t>Purpose: Shows the same ingredients carrying a longer answer, so the viewer sees one system rather than three tricks.</a:t>
+            </a:r>
+          </a:p>
+          <a:p>
+            <a:r>
+              <a:t>Hold: 7 to 8 seconds</a:t>
             </a:r>
           </a:p>
         </p:txBody>
@@ -975,30 +1105,36 @@
           <a:lstStyle/>
           <a:p>
             <a:r>
-              <a:t>V4_MG06_Story_Explains_Proof_Supports.png  (MG06)</a:t>
+              <a:t>V4_MG06_The_Objection.png  (MG06)</a:t>
             </a:r>
           </a:p>
           <a:p/>
           <a:p>
             <a:r>
-              <a:t>On screen: A STORY EXPLAINS. PROOF SUPPORTS.</a:t>
+              <a:t>Status: REUSE</a:t>
             </a:r>
           </a:p>
           <a:p/>
           <a:p>
             <a:r>
-              <a:t>Script: "And remember: A story explains. Proof supports."</a:t>
+              <a:t>On screen: WHY SO MANY CHANGES?</a:t>
             </a:r>
           </a:p>
           <a:p/>
           <a:p>
             <a:r>
-              <a:t>Purpose: The line that earns the resource bridge without turning the ending into a pitch.</a:t>
-            </a:r>
-          </a:p>
-          <a:p>
-            <a:r>
-              <a:t>Hold: 7 to 8 seconds</a:t>
+              <a:t>Script: “Why so many changes?”</a:t>
+            </a:r>
+          </a:p>
+          <a:p/>
+          <a:p>
+            <a:r>
+              <a:t>Purpose: Puts the actual question on screen, then reframes it before the answer is taught.</a:t>
+            </a:r>
+          </a:p>
+          <a:p>
+            <a:r>
+              <a:t>Hold: 6 to 7 seconds</a:t>
             </a:r>
           </a:p>
         </p:txBody>
@@ -1068,30 +1204,36 @@
           <a:lstStyle/>
           <a:p>
             <a:r>
-              <a:t>V4_MG07_All_Three_Versions.png  (MG07)</a:t>
+              <a:t>V4_MG07_Story_Explains_Proof_Supports.png  (MG07)</a:t>
             </a:r>
           </a:p>
           <a:p/>
           <a:p>
             <a:r>
-              <a:t>On screen: 20 SECONDS / 90 SECONDS / THE OBJECTION</a:t>
+              <a:t>Status: REUSE</a:t>
             </a:r>
           </a:p>
           <a:p/>
           <a:p>
             <a:r>
-              <a:t>Script: "So now you have all three. The twenty-second version. The ninety-second version. The objection version."</a:t>
+              <a:t>On screen: A STORY EXPLAINS. PROOF SUPPORTS.</a:t>
             </a:r>
           </a:p>
           <a:p/>
           <a:p>
             <a:r>
-              <a:t>Purpose: Summary before the practice instruction.</a:t>
-            </a:r>
-          </a:p>
-          <a:p>
-            <a:r>
-              <a:t>Hold: 6 to 7 seconds</a:t>
+              <a:t>Script: A story explains.</a:t>
+            </a:r>
+          </a:p>
+          <a:p/>
+          <a:p>
+            <a:r>
+              <a:t>Purpose: The line that earns the resource bridge without turning the ending into a pitch.</a:t>
+            </a:r>
+          </a:p>
+          <a:p>
+            <a:r>
+              <a:t>Hold: 7 to 8 seconds</a:t>
             </a:r>
           </a:p>
         </p:txBody>
@@ -1161,30 +1303,36 @@
           <a:lstStyle/>
           <a:p>
             <a:r>
-              <a:t>V4_CTA_Career_Evidence_Starter.png  (CTA)</a:t>
+              <a:t>V4_MG08_All_Three_Versions.png  (MG08)</a:t>
             </a:r>
           </a:p>
           <a:p/>
           <a:p>
             <a:r>
-              <a:t>On screen: SHARE YOUR 20-SECOND VERSION / Free 10-Minute Career Evidence Starter / temidayoafonja.com/career-evidence-starter</a:t>
+              <a:t>Status: REUSE</a:t>
             </a:r>
           </a:p>
           <a:p/>
           <a:p>
             <a:r>
-              <a:t>Script: "If you get your twenty-second version working, put it in the comments... start with the free 10-Minute Career Evidence Starter in the pinned comment."</a:t>
+              <a:t>On screen: 20 SECONDS / 90 SECONDS / THE OBJECTION</a:t>
             </a:r>
           </a:p>
           <a:p/>
           <a:p>
             <a:r>
-              <a:t>Purpose: Carries the spoken comment CTA and the pinned resource in one card. Keep the Proof is not on this card; it stays in the description.</a:t>
-            </a:r>
-          </a:p>
-          <a:p>
-            <a:r>
-              <a:t>Hold: 8 to 9 seconds</a:t>
+              <a:t>Script: So now you have all three.</a:t>
+            </a:r>
+          </a:p>
+          <a:p/>
+          <a:p>
+            <a:r>
+              <a:t>Purpose: Summary before the practice instruction.</a:t>
+            </a:r>
+          </a:p>
+          <a:p>
+            <a:r>
+              <a:t>Hold: 6 to 7 seconds</a:t>
             </a:r>
           </a:p>
         </p:txBody>
@@ -1254,30 +1402,36 @@
           <a:lstStyle/>
           <a:p>
             <a:r>
-              <a:t>V4_WatchNext_Why_Nobody_Can_Tell.png  (WN)</a:t>
+              <a:t>V4_CTA_Career_Evidence_Starter.png  (CTA)</a:t>
             </a:r>
           </a:p>
           <a:p/>
           <a:p>
             <a:r>
-              <a:t>On screen: WATCH NEXT: WHY NOBODY CAN TELL WHAT YOU'RE ACTUALLY GOOD AT</a:t>
+              <a:t>Status: REUSE</a:t>
             </a:r>
           </a:p>
           <a:p/>
           <a:p>
             <a:r>
-              <a:t>Script: "Watch Why Nobody Can Tell What You're Actually Good At next."</a:t>
+              <a:t>On screen: SHARE YOUR 20-SECOND VERSION / Free 10-Minute Career Evidence Starter / temidayoafonja.com/career-evidence-starter</a:t>
             </a:r>
           </a:p>
           <a:p/>
           <a:p>
             <a:r>
-              <a:t>Purpose: Final visual. The right of frame is left clear for the clickable YouTube end-screen element.</a:t>
-            </a:r>
-          </a:p>
-          <a:p>
-            <a:r>
-              <a:t>Hold: 10 to 14 seconds, through both closing lines and past the last word.</a:t>
+              <a:t>Script: If you get your twenty-second version working, put it in the comments.</a:t>
+            </a:r>
+          </a:p>
+          <a:p/>
+          <a:p>
+            <a:r>
+              <a:t>Purpose: Carries the spoken comment CTA and the pinned resource in one card.</a:t>
+            </a:r>
+          </a:p>
+          <a:p>
+            <a:r>
+              <a:t>Hold: 8 to 9 seconds</a:t>
             </a:r>
           </a:p>
         </p:txBody>
@@ -4335,7 +4489,7 @@
         </p:nvSpPr>
         <p:spPr>
           <a:xfrm>
-            <a:off x="1016000" y="1951164"/>
+            <a:off x="1016000" y="2045081"/>
             <a:ext cx="10160000" cy="1524000"/>
           </a:xfrm>
           <a:prstGeom prst="rect">
@@ -4355,7 +4509,7 @@
               </a:lnSpc>
             </a:pPr>
             <a:r>
-              <a:rPr sz="4800" b="1" i="0">
+              <a:rPr sz="4400" b="1" i="0">
                 <a:solidFill>
                   <a:srgbClr val="F5F1E8"/>
                 </a:solidFill>
@@ -4363,11 +4517,11 @@
                 <a:ea typeface="Montserrat"/>
                 <a:cs typeface="Montserrat"/>
               </a:rPr>
-              <a:t>STOP EXPLAINING</a:t>
+              <a:t>LESS LIKE AN</a:t>
             </a:r>
             <a:br/>
             <a:r>
-              <a:rPr sz="4800" b="1" i="0">
+              <a:rPr sz="4400" b="1" i="0">
                 <a:solidFill>
                   <a:srgbClr val="F5F1E8"/>
                 </a:solidFill>
@@ -4375,11 +4529,11 @@
                 <a:ea typeface="Montserrat"/>
                 <a:cs typeface="Montserrat"/>
               </a:rPr>
-              <a:t>YOUR CAREER</a:t>
+              <a:t>INTRODUCTION.</a:t>
             </a:r>
             <a:br/>
             <a:r>
-              <a:rPr sz="4800" b="1" i="0">
+              <a:rPr sz="4400" b="1" i="0">
                 <a:solidFill>
                   <a:srgbClr val="F5F1E8"/>
                 </a:solidFill>
@@ -4387,7 +4541,7 @@
                 <a:ea typeface="Montserrat"/>
                 <a:cs typeface="Montserrat"/>
               </a:rPr>
-              <a:t>IN ORDER.</a:t>
+              <a:t>MORE LIKE A DEFENSE.</a:t>
             </a:r>
           </a:p>
         </p:txBody>
@@ -4400,7 +4554,7 @@
         </p:nvSpPr>
         <p:spPr>
           <a:xfrm>
-            <a:off x="1016000" y="4291520"/>
+            <a:off x="1016000" y="4214749"/>
             <a:ext cx="10160000" cy="1524000"/>
           </a:xfrm>
           <a:prstGeom prst="rect">
@@ -4420,7 +4574,7 @@
               </a:lnSpc>
             </a:pPr>
             <a:r>
-              <a:rPr sz="2700" b="0" i="0">
+              <a:rPr sz="2600" b="0" i="0">
                 <a:solidFill>
                   <a:srgbClr val="B9C3D2"/>
                 </a:solidFill>
@@ -4428,7 +4582,219 @@
                 <a:ea typeface="DM Sans"/>
                 <a:cs typeface="DM Sans"/>
               </a:rPr>
-              <a:t>Chronology makes them build the bridge.</a:t>
+              <a:t>And you still have not said what the work built in you.</a:t>
+            </a:r>
+          </a:p>
+        </p:txBody>
+      </p:sp>
+    </p:spTree>
+  </p:cSld>
+  <p:clrMapOvr>
+    <a:masterClrMapping/>
+  </p:clrMapOvr>
+</p:sld>
+</file>
+
+<file path=ppt/slides/slide10.xml><?xml version="1.0" encoding="utf-8"?>
+<p:sld xmlns:a="http://schemas.openxmlformats.org/drawingml/2006/main" xmlns:p="http://schemas.openxmlformats.org/presentationml/2006/main" xmlns:r="http://schemas.openxmlformats.org/officeDocument/2006/relationships">
+  <p:cSld>
+    <p:spTree>
+      <p:nvGrpSpPr>
+        <p:cNvPr id="1" name=""/>
+        <p:cNvGrpSpPr/>
+        <p:nvPr/>
+      </p:nvGrpSpPr>
+      <p:grpSpPr/>
+      <p:sp>
+        <p:nvSpPr>
+          <p:cNvPr id="2" name="Rectangle 1"/>
+          <p:cNvSpPr/>
+          <p:nvPr/>
+        </p:nvSpPr>
+        <p:spPr>
+          <a:xfrm>
+            <a:off x="0" y="0"/>
+            <a:ext cx="12192000" cy="6858000"/>
+          </a:xfrm>
+          <a:prstGeom prst="rect">
+            <a:avLst/>
+          </a:prstGeom>
+          <a:solidFill>
+            <a:srgbClr val="112345"/>
+          </a:solidFill>
+          <a:ln>
+            <a:noFill/>
+          </a:ln>
+          <a:effectLst/>
+        </p:spPr>
+        <p:style>
+          <a:lnRef idx="1">
+            <a:schemeClr val="accent1"/>
+          </a:lnRef>
+          <a:fillRef idx="3">
+            <a:schemeClr val="accent1"/>
+          </a:fillRef>
+          <a:effectRef idx="2">
+            <a:schemeClr val="accent1"/>
+          </a:effectRef>
+          <a:fontRef idx="minor">
+            <a:schemeClr val="lt1"/>
+          </a:fontRef>
+        </p:style>
+        <p:txBody>
+          <a:bodyPr rtlCol="0" anchor="ctr"/>
+          <a:lstStyle/>
+          <a:p>
+            <a:pPr algn="ctr"/>
+          </a:p>
+        </p:txBody>
+      </p:sp>
+      <p:sp>
+        <p:nvSpPr>
+          <p:cNvPr id="3" name="TextBox 2"/>
+          <p:cNvSpPr txBox="1"/>
+          <p:nvPr/>
+        </p:nvSpPr>
+        <p:spPr>
+          <a:xfrm>
+            <a:off x="1016000" y="2245868"/>
+            <a:ext cx="5461000" cy="1524000"/>
+          </a:xfrm>
+          <a:prstGeom prst="rect">
+            <a:avLst/>
+          </a:prstGeom>
+          <a:noFill/>
+        </p:spPr>
+        <p:txBody>
+          <a:bodyPr wrap="square" lIns="0" rIns="0" tIns="0" bIns="0" anchor="t">
+            <a:spAutoFit/>
+          </a:bodyPr>
+          <a:lstStyle/>
+          <a:p>
+            <a:pPr algn="l">
+              <a:lnSpc>
+                <a:spcPct val="100000"/>
+              </a:lnSpc>
+            </a:pPr>
+            <a:r>
+              <a:rPr sz="1500" b="1" i="0" spc="250">
+                <a:solidFill>
+                  <a:srgbClr val="C9A84C"/>
+                </a:solidFill>
+                <a:latin typeface="Montserrat"/>
+                <a:ea typeface="Montserrat"/>
+                <a:cs typeface="Montserrat"/>
+              </a:rPr>
+              <a:t>WATCH NEXT</a:t>
+            </a:r>
+          </a:p>
+        </p:txBody>
+      </p:sp>
+      <p:sp>
+        <p:nvSpPr>
+          <p:cNvPr id="4" name="Rectangle 3"/>
+          <p:cNvSpPr/>
+          <p:nvPr/>
+        </p:nvSpPr>
+        <p:spPr>
+          <a:xfrm>
+            <a:off x="1016000" y="2626868"/>
+            <a:ext cx="762000" cy="25400"/>
+          </a:xfrm>
+          <a:prstGeom prst="rect">
+            <a:avLst/>
+          </a:prstGeom>
+          <a:solidFill>
+            <a:srgbClr val="C9A84C"/>
+          </a:solidFill>
+          <a:ln>
+            <a:noFill/>
+          </a:ln>
+          <a:effectLst/>
+        </p:spPr>
+        <p:style>
+          <a:lnRef idx="1">
+            <a:schemeClr val="accent1"/>
+          </a:lnRef>
+          <a:fillRef idx="3">
+            <a:schemeClr val="accent1"/>
+          </a:fillRef>
+          <a:effectRef idx="2">
+            <a:schemeClr val="accent1"/>
+          </a:effectRef>
+          <a:fontRef idx="minor">
+            <a:schemeClr val="lt1"/>
+          </a:fontRef>
+        </p:style>
+        <p:txBody>
+          <a:bodyPr rtlCol="0" anchor="ctr"/>
+          <a:lstStyle/>
+          <a:p>
+            <a:pPr algn="ctr"/>
+          </a:p>
+        </p:txBody>
+      </p:sp>
+      <p:sp>
+        <p:nvSpPr>
+          <p:cNvPr id="5" name="TextBox 4"/>
+          <p:cNvSpPr txBox="1"/>
+          <p:nvPr/>
+        </p:nvSpPr>
+        <p:spPr>
+          <a:xfrm>
+            <a:off x="1016000" y="2957068"/>
+            <a:ext cx="5461000" cy="1524000"/>
+          </a:xfrm>
+          <a:prstGeom prst="rect">
+            <a:avLst/>
+          </a:prstGeom>
+          <a:noFill/>
+        </p:spPr>
+        <p:txBody>
+          <a:bodyPr wrap="square" lIns="0" rIns="0" tIns="0" bIns="0" anchor="t">
+            <a:spAutoFit/>
+          </a:bodyPr>
+          <a:lstStyle/>
+          <a:p>
+            <a:pPr algn="l">
+              <a:lnSpc>
+                <a:spcPct val="116000"/>
+              </a:lnSpc>
+            </a:pPr>
+            <a:r>
+              <a:rPr sz="3400" b="1" i="0">
+                <a:solidFill>
+                  <a:srgbClr val="F5F1E8"/>
+                </a:solidFill>
+                <a:latin typeface="Montserrat"/>
+                <a:ea typeface="Montserrat"/>
+                <a:cs typeface="Montserrat"/>
+              </a:rPr>
+              <a:t>Why Nobody Can Tell</a:t>
+            </a:r>
+            <a:br/>
+            <a:r>
+              <a:rPr sz="3400" b="1" i="0">
+                <a:solidFill>
+                  <a:srgbClr val="F5F1E8"/>
+                </a:solidFill>
+                <a:latin typeface="Montserrat"/>
+                <a:ea typeface="Montserrat"/>
+                <a:cs typeface="Montserrat"/>
+              </a:rPr>
+              <a:t>What You're</a:t>
+            </a:r>
+            <a:br/>
+            <a:r>
+              <a:rPr sz="3400" b="1" i="0">
+                <a:solidFill>
+                  <a:srgbClr val="F5F1E8"/>
+                </a:solidFill>
+                <a:latin typeface="Montserrat"/>
+                <a:ea typeface="Montserrat"/>
+                <a:cs typeface="Montserrat"/>
+              </a:rPr>
+              <a:t>Actually Good At</a:t>
             </a:r>
           </a:p>
         </p:txBody>
@@ -4531,7 +4897,7 @@
                 <a:ea typeface="Montserrat"/>
                 <a:cs typeface="Montserrat"/>
               </a:rPr>
-              <a:t>ONE STRUCTURE, THREE VERSIONS</a:t>
+              <a:t>ONE SET OF INGREDIENTS</a:t>
             </a:r>
           </a:p>
         </p:txBody>
@@ -4862,7 +5228,7 @@
                 <a:ea typeface="DM Sans"/>
                 <a:cs typeface="DM Sans"/>
               </a:rPr>
-              <a:t>The detail changes. The structure does not.</a:t>
+              <a:t>The ingredients stay the same. The order depends on the question.</a:t>
             </a:r>
           </a:p>
         </p:txBody>
@@ -4900,7 +5266,7 @@
             <a:avLst/>
           </a:prstGeom>
           <a:solidFill>
-            <a:srgbClr val="112345"/>
+            <a:srgbClr val="F5F1E8"/>
           </a:solidFill>
           <a:ln>
             <a:noFill/>
@@ -4965,7 +5331,7 @@
                 <a:ea typeface="Montserrat"/>
                 <a:cs typeface="Montserrat"/>
               </a:rPr>
-              <a:t>THE 20 SECOND VERSION</a:t>
+              <a:t>SAME INGREDIENTS, DIFFERENT ORDER</a:t>
             </a:r>
           </a:p>
         </p:txBody>
@@ -5022,8 +5388,93 @@
         </p:nvSpPr>
         <p:spPr>
           <a:xfrm>
-            <a:off x="1016000" y="2074037"/>
-            <a:ext cx="698500" cy="1524000"/>
+            <a:off x="1016000" y="1721231"/>
+            <a:ext cx="10160000" cy="1524000"/>
+          </a:xfrm>
+          <a:prstGeom prst="rect">
+            <a:avLst/>
+          </a:prstGeom>
+          <a:noFill/>
+        </p:spPr>
+        <p:txBody>
+          <a:bodyPr wrap="square" lIns="0" rIns="0" tIns="0" bIns="0" anchor="t">
+            <a:spAutoFit/>
+          </a:bodyPr>
+          <a:lstStyle/>
+          <a:p>
+            <a:pPr algn="l">
+              <a:lnSpc>
+                <a:spcPct val="112000"/>
+              </a:lnSpc>
+            </a:pPr>
+            <a:r>
+              <a:rPr sz="3900" b="1" i="0">
+                <a:solidFill>
+                  <a:srgbClr val="112345"/>
+                </a:solidFill>
+                <a:latin typeface="Montserrat"/>
+                <a:ea typeface="Montserrat"/>
+                <a:cs typeface="Montserrat"/>
+              </a:rPr>
+              <a:t>The order depends on the question.</a:t>
+            </a:r>
+          </a:p>
+        </p:txBody>
+      </p:sp>
+      <p:sp>
+        <p:nvSpPr>
+          <p:cNvPr id="6" name="Rectangle 5"/>
+          <p:cNvSpPr/>
+          <p:nvPr/>
+        </p:nvSpPr>
+        <p:spPr>
+          <a:xfrm>
+            <a:off x="1016000" y="2682367"/>
+            <a:ext cx="4826000" cy="25400"/>
+          </a:xfrm>
+          <a:prstGeom prst="rect">
+            <a:avLst/>
+          </a:prstGeom>
+          <a:solidFill>
+            <a:srgbClr val="C9A84C"/>
+          </a:solidFill>
+          <a:ln>
+            <a:noFill/>
+          </a:ln>
+          <a:effectLst/>
+        </p:spPr>
+        <p:style>
+          <a:lnRef idx="1">
+            <a:schemeClr val="accent1"/>
+          </a:lnRef>
+          <a:fillRef idx="3">
+            <a:schemeClr val="accent1"/>
+          </a:fillRef>
+          <a:effectRef idx="2">
+            <a:schemeClr val="accent1"/>
+          </a:effectRef>
+          <a:fontRef idx="minor">
+            <a:schemeClr val="lt1"/>
+          </a:fontRef>
+        </p:style>
+        <p:txBody>
+          <a:bodyPr rtlCol="0" anchor="ctr"/>
+          <a:lstStyle/>
+          <a:p>
+            <a:pPr algn="ctr"/>
+          </a:p>
+        </p:txBody>
+      </p:sp>
+      <p:sp>
+        <p:nvSpPr>
+          <p:cNvPr id="7" name="TextBox 6"/>
+          <p:cNvSpPr txBox="1"/>
+          <p:nvPr/>
+        </p:nvSpPr>
+        <p:spPr>
+          <a:xfrm>
+            <a:off x="1016000" y="2898267"/>
+            <a:ext cx="4826000" cy="1524000"/>
           </a:xfrm>
           <a:prstGeom prst="rect">
             <a:avLst/>
@@ -5042,7 +5493,215 @@
               </a:lnSpc>
             </a:pPr>
             <a:r>
-              <a:rPr sz="2000" b="1" i="0" spc="75">
+              <a:rPr sz="2900" b="1" i="0">
+                <a:solidFill>
+                  <a:srgbClr val="112345"/>
+                </a:solidFill>
+                <a:latin typeface="Montserrat"/>
+                <a:ea typeface="Montserrat"/>
+                <a:cs typeface="Montserrat"/>
+              </a:rPr>
+              <a:t>QUICK INTRODUCTION</a:t>
+            </a:r>
+          </a:p>
+        </p:txBody>
+      </p:sp>
+      <p:sp>
+        <p:nvSpPr>
+          <p:cNvPr id="8" name="TextBox 7"/>
+          <p:cNvSpPr txBox="1"/>
+          <p:nvPr/>
+        </p:nvSpPr>
+        <p:spPr>
+          <a:xfrm>
+            <a:off x="1016000" y="3445129"/>
+            <a:ext cx="4826000" cy="1524000"/>
+          </a:xfrm>
+          <a:prstGeom prst="rect">
+            <a:avLst/>
+          </a:prstGeom>
+          <a:noFill/>
+        </p:spPr>
+        <p:txBody>
+          <a:bodyPr wrap="square" lIns="0" rIns="0" tIns="0" bIns="0" anchor="t">
+            <a:spAutoFit/>
+          </a:bodyPr>
+          <a:lstStyle/>
+          <a:p>
+            <a:pPr algn="l">
+              <a:lnSpc>
+                <a:spcPct val="134000"/>
+              </a:lnSpc>
+            </a:pPr>
+            <a:r>
+              <a:rPr sz="2500" b="0" i="0">
+                <a:solidFill>
+                  <a:srgbClr val="5A6B82"/>
+                </a:solidFill>
+                <a:latin typeface="DM Sans"/>
+                <a:ea typeface="DM Sans"/>
+                <a:cs typeface="DM Sans"/>
+              </a:rPr>
+              <a:t>Lead with the Spine.</a:t>
+            </a:r>
+          </a:p>
+        </p:txBody>
+      </p:sp>
+      <p:sp>
+        <p:nvSpPr>
+          <p:cNvPr id="9" name="Rectangle 8"/>
+          <p:cNvSpPr/>
+          <p:nvPr/>
+        </p:nvSpPr>
+        <p:spPr>
+          <a:xfrm>
+            <a:off x="6350000" y="2682367"/>
+            <a:ext cx="4826000" cy="25400"/>
+          </a:xfrm>
+          <a:prstGeom prst="rect">
+            <a:avLst/>
+          </a:prstGeom>
+          <a:solidFill>
+            <a:srgbClr val="C9A84C"/>
+          </a:solidFill>
+          <a:ln>
+            <a:noFill/>
+          </a:ln>
+          <a:effectLst/>
+        </p:spPr>
+        <p:style>
+          <a:lnRef idx="1">
+            <a:schemeClr val="accent1"/>
+          </a:lnRef>
+          <a:fillRef idx="3">
+            <a:schemeClr val="accent1"/>
+          </a:fillRef>
+          <a:effectRef idx="2">
+            <a:schemeClr val="accent1"/>
+          </a:effectRef>
+          <a:fontRef idx="minor">
+            <a:schemeClr val="lt1"/>
+          </a:fontRef>
+        </p:style>
+        <p:txBody>
+          <a:bodyPr rtlCol="0" anchor="ctr"/>
+          <a:lstStyle/>
+          <a:p>
+            <a:pPr algn="ctr"/>
+          </a:p>
+        </p:txBody>
+      </p:sp>
+      <p:sp>
+        <p:nvSpPr>
+          <p:cNvPr id="10" name="TextBox 9"/>
+          <p:cNvSpPr txBox="1"/>
+          <p:nvPr/>
+        </p:nvSpPr>
+        <p:spPr>
+          <a:xfrm>
+            <a:off x="6350000" y="2898267"/>
+            <a:ext cx="4826000" cy="1524000"/>
+          </a:xfrm>
+          <a:prstGeom prst="rect">
+            <a:avLst/>
+          </a:prstGeom>
+          <a:noFill/>
+        </p:spPr>
+        <p:txBody>
+          <a:bodyPr wrap="square" lIns="0" rIns="0" tIns="0" bIns="0" anchor="t">
+            <a:spAutoFit/>
+          </a:bodyPr>
+          <a:lstStyle/>
+          <a:p>
+            <a:pPr algn="l">
+              <a:lnSpc>
+                <a:spcPct val="114000"/>
+              </a:lnSpc>
+            </a:pPr>
+            <a:r>
+              <a:rPr sz="2900" b="1" i="0">
+                <a:solidFill>
+                  <a:srgbClr val="112345"/>
+                </a:solidFill>
+                <a:latin typeface="Montserrat"/>
+                <a:ea typeface="Montserrat"/>
+                <a:cs typeface="Montserrat"/>
+              </a:rPr>
+              <a:t>LONGER ANSWER</a:t>
+            </a:r>
+          </a:p>
+        </p:txBody>
+      </p:sp>
+      <p:sp>
+        <p:nvSpPr>
+          <p:cNvPr id="11" name="TextBox 10"/>
+          <p:cNvSpPr txBox="1"/>
+          <p:nvPr/>
+        </p:nvSpPr>
+        <p:spPr>
+          <a:xfrm>
+            <a:off x="6350000" y="3445129"/>
+            <a:ext cx="4826000" cy="1524000"/>
+          </a:xfrm>
+          <a:prstGeom prst="rect">
+            <a:avLst/>
+          </a:prstGeom>
+          <a:noFill/>
+        </p:spPr>
+        <p:txBody>
+          <a:bodyPr wrap="square" lIns="0" rIns="0" tIns="0" bIns="0" anchor="t">
+            <a:spAutoFit/>
+          </a:bodyPr>
+          <a:lstStyle/>
+          <a:p>
+            <a:pPr algn="l">
+              <a:lnSpc>
+                <a:spcPct val="134000"/>
+              </a:lnSpc>
+            </a:pPr>
+            <a:r>
+              <a:rPr sz="2500" b="0" i="0">
+                <a:solidFill>
+                  <a:srgbClr val="5A6B82"/>
+                </a:solidFill>
+                <a:latin typeface="DM Sans"/>
+                <a:ea typeface="DM Sans"/>
+                <a:cs typeface="DM Sans"/>
+              </a:rPr>
+              <a:t>Use Chapters to make the Spine visible.</a:t>
+            </a:r>
+          </a:p>
+        </p:txBody>
+      </p:sp>
+      <p:sp>
+        <p:nvSpPr>
+          <p:cNvPr id="12" name="TextBox 11"/>
+          <p:cNvSpPr txBox="1"/>
+          <p:nvPr/>
+        </p:nvSpPr>
+        <p:spPr>
+          <a:xfrm>
+            <a:off x="1016000" y="4664329"/>
+            <a:ext cx="10160000" cy="1524000"/>
+          </a:xfrm>
+          <a:prstGeom prst="rect">
+            <a:avLst/>
+          </a:prstGeom>
+          <a:noFill/>
+        </p:spPr>
+        <p:txBody>
+          <a:bodyPr wrap="square" lIns="0" rIns="0" tIns="0" bIns="0" anchor="t">
+            <a:spAutoFit/>
+          </a:bodyPr>
+          <a:lstStyle/>
+          <a:p>
+            <a:pPr algn="l">
+              <a:lnSpc>
+                <a:spcPct val="120000"/>
+              </a:lnSpc>
+            </a:pPr>
+            <a:r>
+              <a:rPr sz="2100" b="1" i="0">
                 <a:solidFill>
                   <a:srgbClr val="C9A84C"/>
                 </a:solidFill>
@@ -5050,253 +5709,7 @@
                 <a:ea typeface="Montserrat"/>
                 <a:cs typeface="Montserrat"/>
               </a:rPr>
-              <a:t>01</a:t>
-            </a:r>
-          </a:p>
-        </p:txBody>
-      </p:sp>
-      <p:sp>
-        <p:nvSpPr>
-          <p:cNvPr id="6" name="TextBox 5"/>
-          <p:cNvSpPr txBox="1"/>
-          <p:nvPr/>
-        </p:nvSpPr>
-        <p:spPr>
-          <a:xfrm>
-            <a:off x="1854200" y="1997837"/>
-            <a:ext cx="9321800" cy="1524000"/>
-          </a:xfrm>
-          <a:prstGeom prst="rect">
-            <a:avLst/>
-          </a:prstGeom>
-          <a:noFill/>
-        </p:spPr>
-        <p:txBody>
-          <a:bodyPr wrap="square" lIns="0" rIns="0" tIns="0" bIns="0" anchor="t">
-            <a:spAutoFit/>
-          </a:bodyPr>
-          <a:lstStyle/>
-          <a:p>
-            <a:pPr algn="l">
-              <a:lnSpc>
-                <a:spcPct val="112000"/>
-              </a:lnSpc>
-            </a:pPr>
-            <a:r>
-              <a:rPr sz="3400" b="1" i="0">
-                <a:solidFill>
-                  <a:srgbClr val="F5F1E8"/>
-                </a:solidFill>
-                <a:latin typeface="Montserrat"/>
-                <a:ea typeface="Montserrat"/>
-                <a:cs typeface="Montserrat"/>
-              </a:rPr>
-              <a:t>I ...</a:t>
-            </a:r>
-          </a:p>
-        </p:txBody>
-      </p:sp>
-      <p:sp>
-        <p:nvSpPr>
-          <p:cNvPr id="7" name="TextBox 6"/>
-          <p:cNvSpPr txBox="1"/>
-          <p:nvPr/>
-        </p:nvSpPr>
-        <p:spPr>
-          <a:xfrm>
-            <a:off x="1016000" y="2811653"/>
-            <a:ext cx="698500" cy="1524000"/>
-          </a:xfrm>
-          <a:prstGeom prst="rect">
-            <a:avLst/>
-          </a:prstGeom>
-          <a:noFill/>
-        </p:spPr>
-        <p:txBody>
-          <a:bodyPr wrap="square" lIns="0" rIns="0" tIns="0" bIns="0" anchor="t">
-            <a:spAutoFit/>
-          </a:bodyPr>
-          <a:lstStyle/>
-          <a:p>
-            <a:pPr algn="l">
-              <a:lnSpc>
-                <a:spcPct val="114000"/>
-              </a:lnSpc>
-            </a:pPr>
-            <a:r>
-              <a:rPr sz="2000" b="1" i="0" spc="75">
-                <a:solidFill>
-                  <a:srgbClr val="C9A84C"/>
-                </a:solidFill>
-                <a:latin typeface="Montserrat"/>
-                <a:ea typeface="Montserrat"/>
-                <a:cs typeface="Montserrat"/>
-              </a:rPr>
-              <a:t>02</a:t>
-            </a:r>
-          </a:p>
-        </p:txBody>
-      </p:sp>
-      <p:sp>
-        <p:nvSpPr>
-          <p:cNvPr id="8" name="TextBox 7"/>
-          <p:cNvSpPr txBox="1"/>
-          <p:nvPr/>
-        </p:nvSpPr>
-        <p:spPr>
-          <a:xfrm>
-            <a:off x="1854200" y="2735453"/>
-            <a:ext cx="9321800" cy="1524000"/>
-          </a:xfrm>
-          <a:prstGeom prst="rect">
-            <a:avLst/>
-          </a:prstGeom>
-          <a:noFill/>
-        </p:spPr>
-        <p:txBody>
-          <a:bodyPr wrap="square" lIns="0" rIns="0" tIns="0" bIns="0" anchor="t">
-            <a:spAutoFit/>
-          </a:bodyPr>
-          <a:lstStyle/>
-          <a:p>
-            <a:pPr algn="l">
-              <a:lnSpc>
-                <a:spcPct val="112000"/>
-              </a:lnSpc>
-            </a:pPr>
-            <a:r>
-              <a:rPr sz="3400" b="1" i="0">
-                <a:solidFill>
-                  <a:srgbClr val="F5F1E8"/>
-                </a:solidFill>
-                <a:latin typeface="Montserrat"/>
-                <a:ea typeface="Montserrat"/>
-                <a:cs typeface="Montserrat"/>
-              </a:rPr>
-              <a:t>I've done that in ...</a:t>
-            </a:r>
-          </a:p>
-        </p:txBody>
-      </p:sp>
-      <p:sp>
-        <p:nvSpPr>
-          <p:cNvPr id="9" name="TextBox 8"/>
-          <p:cNvSpPr txBox="1"/>
-          <p:nvPr/>
-        </p:nvSpPr>
-        <p:spPr>
-          <a:xfrm>
-            <a:off x="1016000" y="3549269"/>
-            <a:ext cx="698500" cy="1524000"/>
-          </a:xfrm>
-          <a:prstGeom prst="rect">
-            <a:avLst/>
-          </a:prstGeom>
-          <a:noFill/>
-        </p:spPr>
-        <p:txBody>
-          <a:bodyPr wrap="square" lIns="0" rIns="0" tIns="0" bIns="0" anchor="t">
-            <a:spAutoFit/>
-          </a:bodyPr>
-          <a:lstStyle/>
-          <a:p>
-            <a:pPr algn="l">
-              <a:lnSpc>
-                <a:spcPct val="114000"/>
-              </a:lnSpc>
-            </a:pPr>
-            <a:r>
-              <a:rPr sz="2000" b="1" i="0" spc="75">
-                <a:solidFill>
-                  <a:srgbClr val="C9A84C"/>
-                </a:solidFill>
-                <a:latin typeface="Montserrat"/>
-                <a:ea typeface="Montserrat"/>
-                <a:cs typeface="Montserrat"/>
-              </a:rPr>
-              <a:t>03</a:t>
-            </a:r>
-          </a:p>
-        </p:txBody>
-      </p:sp>
-      <p:sp>
-        <p:nvSpPr>
-          <p:cNvPr id="10" name="TextBox 9"/>
-          <p:cNvSpPr txBox="1"/>
-          <p:nvPr/>
-        </p:nvSpPr>
-        <p:spPr>
-          <a:xfrm>
-            <a:off x="1854200" y="3473069"/>
-            <a:ext cx="9321800" cy="1524000"/>
-          </a:xfrm>
-          <a:prstGeom prst="rect">
-            <a:avLst/>
-          </a:prstGeom>
-          <a:noFill/>
-        </p:spPr>
-        <p:txBody>
-          <a:bodyPr wrap="square" lIns="0" rIns="0" tIns="0" bIns="0" anchor="t">
-            <a:spAutoFit/>
-          </a:bodyPr>
-          <a:lstStyle/>
-          <a:p>
-            <a:pPr algn="l">
-              <a:lnSpc>
-                <a:spcPct val="112000"/>
-              </a:lnSpc>
-            </a:pPr>
-            <a:r>
-              <a:rPr sz="3400" b="1" i="0">
-                <a:solidFill>
-                  <a:srgbClr val="F5F1E8"/>
-                </a:solidFill>
-                <a:latin typeface="Montserrat"/>
-                <a:ea typeface="Montserrat"/>
-                <a:cs typeface="Montserrat"/>
-              </a:rPr>
-              <a:t>Today I ...</a:t>
-            </a:r>
-          </a:p>
-        </p:txBody>
-      </p:sp>
-      <p:sp>
-        <p:nvSpPr>
-          <p:cNvPr id="11" name="TextBox 10"/>
-          <p:cNvSpPr txBox="1"/>
-          <p:nvPr/>
-        </p:nvSpPr>
-        <p:spPr>
-          <a:xfrm>
-            <a:off x="1016000" y="4350385"/>
-            <a:ext cx="10160000" cy="1524000"/>
-          </a:xfrm>
-          <a:prstGeom prst="rect">
-            <a:avLst/>
-          </a:prstGeom>
-          <a:noFill/>
-        </p:spPr>
-        <p:txBody>
-          <a:bodyPr wrap="square" lIns="0" rIns="0" tIns="0" bIns="0" anchor="t">
-            <a:spAutoFit/>
-          </a:bodyPr>
-          <a:lstStyle/>
-          <a:p>
-            <a:pPr algn="l">
-              <a:lnSpc>
-                <a:spcPct val="134000"/>
-              </a:lnSpc>
-            </a:pPr>
-            <a:r>
-              <a:rPr sz="2100" b="0" i="0">
-                <a:solidFill>
-                  <a:srgbClr val="B9C3D2"/>
-                </a:solidFill>
-                <a:latin typeface="DM Sans"/>
-                <a:ea typeface="DM Sans"/>
-                <a:cs typeface="DM Sans"/>
-              </a:rPr>
-              <a:t>Work pattern. Two or three contexts. Current direction.</a:t>
+              <a:t>Your Spine does not change depending on who is asking.</a:t>
             </a:r>
           </a:p>
         </p:txBody>
@@ -5334,7 +5747,7 @@
             <a:avLst/>
           </a:prstGeom>
           <a:solidFill>
-            <a:srgbClr val="F5F1E8"/>
+            <a:srgbClr val="112345"/>
           </a:solidFill>
           <a:ln>
             <a:noFill/>
@@ -5399,7 +5812,7 @@
                 <a:ea typeface="Montserrat"/>
                 <a:cs typeface="Montserrat"/>
               </a:rPr>
-              <a:t>THE 90 SECOND VERSION</a:t>
+              <a:t>THE 20 SECOND VERSION</a:t>
             </a:r>
           </a:p>
         </p:txBody>
@@ -5519,13 +5932,13 @@
             <a:r>
               <a:rPr sz="3400" b="1" i="0">
                 <a:solidFill>
-                  <a:srgbClr val="112345"/>
+                  <a:srgbClr val="F5F1E8"/>
                 </a:solidFill>
                 <a:latin typeface="Montserrat"/>
                 <a:ea typeface="Montserrat"/>
                 <a:cs typeface="Montserrat"/>
               </a:rPr>
-              <a:t>CHAPTERS</a:t>
+              <a:t>I ...</a:t>
             </a:r>
           </a:p>
         </p:txBody>
@@ -5601,13 +6014,13 @@
             <a:r>
               <a:rPr sz="3400" b="1" i="0">
                 <a:solidFill>
-                  <a:srgbClr val="112345"/>
+                  <a:srgbClr val="F5F1E8"/>
                 </a:solidFill>
                 <a:latin typeface="Montserrat"/>
                 <a:ea typeface="Montserrat"/>
                 <a:cs typeface="Montserrat"/>
               </a:rPr>
-              <a:t>SPINE</a:t>
+              <a:t>I've done that in ...</a:t>
             </a:r>
           </a:p>
         </p:txBody>
@@ -5683,13 +6096,13 @@
             <a:r>
               <a:rPr sz="3400" b="1" i="0">
                 <a:solidFill>
-                  <a:srgbClr val="112345"/>
+                  <a:srgbClr val="F5F1E8"/>
                 </a:solidFill>
                 <a:latin typeface="Montserrat"/>
                 <a:ea typeface="Montserrat"/>
                 <a:cs typeface="Montserrat"/>
               </a:rPr>
-              <a:t>NEXT DIRECTION</a:t>
+              <a:t>Today I ...</a:t>
             </a:r>
           </a:p>
         </p:txBody>
@@ -5724,13 +6137,13 @@
             <a:r>
               <a:rPr sz="2100" b="0" i="0">
                 <a:solidFill>
-                  <a:srgbClr val="5A6B82"/>
+                  <a:srgbClr val="B9C3D2"/>
                 </a:solidFill>
                 <a:latin typeface="DM Sans"/>
                 <a:ea typeface="DM Sans"/>
                 <a:cs typeface="DM Sans"/>
               </a:rPr>
-              <a:t>Three chapters, not seven. Two examples, not five.</a:t>
+              <a:t>Work pattern. Two or three contexts. Current direction.</a:t>
             </a:r>
           </a:p>
         </p:txBody>
@@ -5833,7 +6246,7 @@
                 <a:ea typeface="Montserrat"/>
                 <a:cs typeface="Montserrat"/>
               </a:rPr>
-              <a:t>THE OBJECTION VERSION</a:t>
+              <a:t>THE 90 SECOND VERSION</a:t>
             </a:r>
           </a:p>
         </p:txBody>
@@ -5890,8 +6303,49 @@
         </p:nvSpPr>
         <p:spPr>
           <a:xfrm>
-            <a:off x="1016000" y="2292540"/>
-            <a:ext cx="10160000" cy="1524000"/>
+            <a:off x="1016000" y="2074037"/>
+            <a:ext cx="698500" cy="1524000"/>
+          </a:xfrm>
+          <a:prstGeom prst="rect">
+            <a:avLst/>
+          </a:prstGeom>
+          <a:noFill/>
+        </p:spPr>
+        <p:txBody>
+          <a:bodyPr wrap="square" lIns="0" rIns="0" tIns="0" bIns="0" anchor="t">
+            <a:spAutoFit/>
+          </a:bodyPr>
+          <a:lstStyle/>
+          <a:p>
+            <a:pPr algn="l">
+              <a:lnSpc>
+                <a:spcPct val="114000"/>
+              </a:lnSpc>
+            </a:pPr>
+            <a:r>
+              <a:rPr sz="2000" b="1" i="0" spc="75">
+                <a:solidFill>
+                  <a:srgbClr val="C9A84C"/>
+                </a:solidFill>
+                <a:latin typeface="Montserrat"/>
+                <a:ea typeface="Montserrat"/>
+                <a:cs typeface="Montserrat"/>
+              </a:rPr>
+              <a:t>01</a:t>
+            </a:r>
+          </a:p>
+        </p:txBody>
+      </p:sp>
+      <p:sp>
+        <p:nvSpPr>
+          <p:cNvPr id="6" name="TextBox 5"/>
+          <p:cNvSpPr txBox="1"/>
+          <p:nvPr/>
+        </p:nvSpPr>
+        <p:spPr>
+          <a:xfrm>
+            <a:off x="1854200" y="1997837"/>
+            <a:ext cx="9321800" cy="1524000"/>
           </a:xfrm>
           <a:prstGeom prst="rect">
             <a:avLst/>
@@ -5910,7 +6364,7 @@
               </a:lnSpc>
             </a:pPr>
             <a:r>
-              <a:rPr sz="4800" b="1" i="0">
+              <a:rPr sz="3400" b="1" i="0">
                 <a:solidFill>
                   <a:srgbClr val="112345"/>
                 </a:solidFill>
@@ -5918,11 +6372,81 @@
                 <a:ea typeface="Montserrat"/>
                 <a:cs typeface="Montserrat"/>
               </a:rPr>
-              <a:t>“WHY SO MANY</a:t>
-            </a:r>
-            <a:br/>
-            <a:r>
-              <a:rPr sz="4800" b="1" i="0">
+              <a:t>CHAPTERS</a:t>
+            </a:r>
+          </a:p>
+        </p:txBody>
+      </p:sp>
+      <p:sp>
+        <p:nvSpPr>
+          <p:cNvPr id="7" name="TextBox 6"/>
+          <p:cNvSpPr txBox="1"/>
+          <p:nvPr/>
+        </p:nvSpPr>
+        <p:spPr>
+          <a:xfrm>
+            <a:off x="1016000" y="2811653"/>
+            <a:ext cx="698500" cy="1524000"/>
+          </a:xfrm>
+          <a:prstGeom prst="rect">
+            <a:avLst/>
+          </a:prstGeom>
+          <a:noFill/>
+        </p:spPr>
+        <p:txBody>
+          <a:bodyPr wrap="square" lIns="0" rIns="0" tIns="0" bIns="0" anchor="t">
+            <a:spAutoFit/>
+          </a:bodyPr>
+          <a:lstStyle/>
+          <a:p>
+            <a:pPr algn="l">
+              <a:lnSpc>
+                <a:spcPct val="114000"/>
+              </a:lnSpc>
+            </a:pPr>
+            <a:r>
+              <a:rPr sz="2000" b="1" i="0" spc="75">
+                <a:solidFill>
+                  <a:srgbClr val="C9A84C"/>
+                </a:solidFill>
+                <a:latin typeface="Montserrat"/>
+                <a:ea typeface="Montserrat"/>
+                <a:cs typeface="Montserrat"/>
+              </a:rPr>
+              <a:t>02</a:t>
+            </a:r>
+          </a:p>
+        </p:txBody>
+      </p:sp>
+      <p:sp>
+        <p:nvSpPr>
+          <p:cNvPr id="8" name="TextBox 7"/>
+          <p:cNvSpPr txBox="1"/>
+          <p:nvPr/>
+        </p:nvSpPr>
+        <p:spPr>
+          <a:xfrm>
+            <a:off x="1854200" y="2735453"/>
+            <a:ext cx="9321800" cy="1524000"/>
+          </a:xfrm>
+          <a:prstGeom prst="rect">
+            <a:avLst/>
+          </a:prstGeom>
+          <a:noFill/>
+        </p:spPr>
+        <p:txBody>
+          <a:bodyPr wrap="square" lIns="0" rIns="0" tIns="0" bIns="0" anchor="t">
+            <a:spAutoFit/>
+          </a:bodyPr>
+          <a:lstStyle/>
+          <a:p>
+            <a:pPr algn="l">
+              <a:lnSpc>
+                <a:spcPct val="112000"/>
+              </a:lnSpc>
+            </a:pPr>
+            <a:r>
+              <a:rPr sz="3400" b="1" i="0">
                 <a:solidFill>
                   <a:srgbClr val="112345"/>
                 </a:solidFill>
@@ -5930,21 +6454,21 @@
                 <a:ea typeface="Montserrat"/>
                 <a:cs typeface="Montserrat"/>
               </a:rPr>
-              <a:t>CHANGES?”</a:t>
-            </a:r>
-          </a:p>
-        </p:txBody>
-      </p:sp>
-      <p:sp>
-        <p:nvSpPr>
-          <p:cNvPr id="6" name="TextBox 5"/>
+              <a:t>SPINE</a:t>
+            </a:r>
+          </a:p>
+        </p:txBody>
+      </p:sp>
+      <p:sp>
+        <p:nvSpPr>
+          <p:cNvPr id="9" name="TextBox 8"/>
           <p:cNvSpPr txBox="1"/>
           <p:nvPr/>
         </p:nvSpPr>
         <p:spPr>
           <a:xfrm>
-            <a:off x="1016000" y="3950144"/>
-            <a:ext cx="10160000" cy="1524000"/>
+            <a:off x="1016000" y="3549269"/>
+            <a:ext cx="698500" cy="1524000"/>
           </a:xfrm>
           <a:prstGeom prst="rect">
             <a:avLst/>
@@ -5959,11 +6483,93 @@
           <a:p>
             <a:pPr algn="l">
               <a:lnSpc>
-                <a:spcPct val="135000"/>
+                <a:spcPct val="114000"/>
               </a:lnSpc>
             </a:pPr>
             <a:r>
-              <a:rPr sz="2700" b="0" i="0">
+              <a:rPr sz="2000" b="1" i="0" spc="75">
+                <a:solidFill>
+                  <a:srgbClr val="C9A84C"/>
+                </a:solidFill>
+                <a:latin typeface="Montserrat"/>
+                <a:ea typeface="Montserrat"/>
+                <a:cs typeface="Montserrat"/>
+              </a:rPr>
+              <a:t>03</a:t>
+            </a:r>
+          </a:p>
+        </p:txBody>
+      </p:sp>
+      <p:sp>
+        <p:nvSpPr>
+          <p:cNvPr id="10" name="TextBox 9"/>
+          <p:cNvSpPr txBox="1"/>
+          <p:nvPr/>
+        </p:nvSpPr>
+        <p:spPr>
+          <a:xfrm>
+            <a:off x="1854200" y="3473069"/>
+            <a:ext cx="9321800" cy="1524000"/>
+          </a:xfrm>
+          <a:prstGeom prst="rect">
+            <a:avLst/>
+          </a:prstGeom>
+          <a:noFill/>
+        </p:spPr>
+        <p:txBody>
+          <a:bodyPr wrap="square" lIns="0" rIns="0" tIns="0" bIns="0" anchor="t">
+            <a:spAutoFit/>
+          </a:bodyPr>
+          <a:lstStyle/>
+          <a:p>
+            <a:pPr algn="l">
+              <a:lnSpc>
+                <a:spcPct val="112000"/>
+              </a:lnSpc>
+            </a:pPr>
+            <a:r>
+              <a:rPr sz="3400" b="1" i="0">
+                <a:solidFill>
+                  <a:srgbClr val="112345"/>
+                </a:solidFill>
+                <a:latin typeface="Montserrat"/>
+                <a:ea typeface="Montserrat"/>
+                <a:cs typeface="Montserrat"/>
+              </a:rPr>
+              <a:t>NEXT DIRECTION</a:t>
+            </a:r>
+          </a:p>
+        </p:txBody>
+      </p:sp>
+      <p:sp>
+        <p:nvSpPr>
+          <p:cNvPr id="11" name="TextBox 10"/>
+          <p:cNvSpPr txBox="1"/>
+          <p:nvPr/>
+        </p:nvSpPr>
+        <p:spPr>
+          <a:xfrm>
+            <a:off x="1016000" y="4350385"/>
+            <a:ext cx="10160000" cy="1524000"/>
+          </a:xfrm>
+          <a:prstGeom prst="rect">
+            <a:avLst/>
+          </a:prstGeom>
+          <a:noFill/>
+        </p:spPr>
+        <p:txBody>
+          <a:bodyPr wrap="square" lIns="0" rIns="0" tIns="0" bIns="0" anchor="t">
+            <a:spAutoFit/>
+          </a:bodyPr>
+          <a:lstStyle/>
+          <a:p>
+            <a:pPr algn="l">
+              <a:lnSpc>
+                <a:spcPct val="134000"/>
+              </a:lnSpc>
+            </a:pPr>
+            <a:r>
+              <a:rPr sz="2100" b="0" i="0">
                 <a:solidFill>
                   <a:srgbClr val="5A6B82"/>
                 </a:solidFill>
@@ -5971,7 +6577,7 @@
                 <a:ea typeface="DM Sans"/>
                 <a:cs typeface="DM Sans"/>
               </a:rPr>
-              <a:t>Often they just cannot see the pattern yet.</a:t>
+              <a:t>Three chapters, not seven. Two examples, not five.</a:t>
             </a:r>
           </a:p>
         </p:txBody>
@@ -6009,7 +6615,7 @@
             <a:avLst/>
           </a:prstGeom>
           <a:solidFill>
-            <a:srgbClr val="112345"/>
+            <a:srgbClr val="F5F1E8"/>
           </a:solidFill>
           <a:ln>
             <a:noFill/>
@@ -6046,7 +6652,92 @@
         </p:nvSpPr>
         <p:spPr>
           <a:xfrm>
-            <a:off x="1016000" y="2320988"/>
+            <a:off x="1016000" y="1066800"/>
+            <a:ext cx="10160000" cy="1524000"/>
+          </a:xfrm>
+          <a:prstGeom prst="rect">
+            <a:avLst/>
+          </a:prstGeom>
+          <a:noFill/>
+        </p:spPr>
+        <p:txBody>
+          <a:bodyPr wrap="square" lIns="0" rIns="0" tIns="0" bIns="0" anchor="t">
+            <a:spAutoFit/>
+          </a:bodyPr>
+          <a:lstStyle/>
+          <a:p>
+            <a:pPr algn="l">
+              <a:lnSpc>
+                <a:spcPct val="100000"/>
+              </a:lnSpc>
+            </a:pPr>
+            <a:r>
+              <a:rPr sz="1500" b="1" i="0" spc="250">
+                <a:solidFill>
+                  <a:srgbClr val="C9A84C"/>
+                </a:solidFill>
+                <a:latin typeface="Montserrat"/>
+                <a:ea typeface="Montserrat"/>
+                <a:cs typeface="Montserrat"/>
+              </a:rPr>
+              <a:t>THE OBJECTION VERSION</a:t>
+            </a:r>
+          </a:p>
+        </p:txBody>
+      </p:sp>
+      <p:sp>
+        <p:nvSpPr>
+          <p:cNvPr id="4" name="Rectangle 3"/>
+          <p:cNvSpPr/>
+          <p:nvPr/>
+        </p:nvSpPr>
+        <p:spPr>
+          <a:xfrm>
+            <a:off x="1016000" y="1422400"/>
+            <a:ext cx="762000" cy="25400"/>
+          </a:xfrm>
+          <a:prstGeom prst="rect">
+            <a:avLst/>
+          </a:prstGeom>
+          <a:solidFill>
+            <a:srgbClr val="C9A84C"/>
+          </a:solidFill>
+          <a:ln>
+            <a:noFill/>
+          </a:ln>
+          <a:effectLst/>
+        </p:spPr>
+        <p:style>
+          <a:lnRef idx="1">
+            <a:schemeClr val="accent1"/>
+          </a:lnRef>
+          <a:fillRef idx="3">
+            <a:schemeClr val="accent1"/>
+          </a:fillRef>
+          <a:effectRef idx="2">
+            <a:schemeClr val="accent1"/>
+          </a:effectRef>
+          <a:fontRef idx="minor">
+            <a:schemeClr val="lt1"/>
+          </a:fontRef>
+        </p:style>
+        <p:txBody>
+          <a:bodyPr rtlCol="0" anchor="ctr"/>
+          <a:lstStyle/>
+          <a:p>
+            <a:pPr algn="ctr"/>
+          </a:p>
+        </p:txBody>
+      </p:sp>
+      <p:sp>
+        <p:nvSpPr>
+          <p:cNvPr id="5" name="TextBox 4"/>
+          <p:cNvSpPr txBox="1"/>
+          <p:nvPr/>
+        </p:nvSpPr>
+        <p:spPr>
+          <a:xfrm>
+            <a:off x="1016000" y="2292540"/>
             <a:ext cx="10160000" cy="1524000"/>
           </a:xfrm>
           <a:prstGeom prst="rect">
@@ -6066,40 +6757,40 @@
               </a:lnSpc>
             </a:pPr>
             <a:r>
-              <a:rPr sz="4600" b="1" i="0">
+              <a:rPr sz="4800" b="1" i="0">
                 <a:solidFill>
-                  <a:srgbClr val="F5F1E8"/>
+                  <a:srgbClr val="112345"/>
                 </a:solidFill>
                 <a:latin typeface="Montserrat"/>
                 <a:ea typeface="Montserrat"/>
                 <a:cs typeface="Montserrat"/>
               </a:rPr>
-              <a:t>A STORY EXPLAINS.</a:t>
+              <a:t>“WHY SO MANY</a:t>
             </a:r>
             <a:br/>
             <a:r>
-              <a:rPr sz="4600" b="1" i="0">
+              <a:rPr sz="4800" b="1" i="0">
                 <a:solidFill>
-                  <a:srgbClr val="F5F1E8"/>
+                  <a:srgbClr val="112345"/>
                 </a:solidFill>
                 <a:latin typeface="Montserrat"/>
                 <a:ea typeface="Montserrat"/>
                 <a:cs typeface="Montserrat"/>
               </a:rPr>
-              <a:t>PROOF SUPPORTS.</a:t>
-            </a:r>
-          </a:p>
-        </p:txBody>
-      </p:sp>
-      <p:sp>
-        <p:nvSpPr>
-          <p:cNvPr id="4" name="TextBox 3"/>
+              <a:t>CHANGES?”</a:t>
+            </a:r>
+          </a:p>
+        </p:txBody>
+      </p:sp>
+      <p:sp>
+        <p:nvSpPr>
+          <p:cNvPr id="6" name="TextBox 5"/>
           <p:cNvSpPr txBox="1"/>
           <p:nvPr/>
         </p:nvSpPr>
         <p:spPr>
           <a:xfrm>
-            <a:off x="1016000" y="3921696"/>
+            <a:off x="1016000" y="3950144"/>
             <a:ext cx="10160000" cy="1524000"/>
           </a:xfrm>
           <a:prstGeom prst="rect">
@@ -6121,13 +6812,13 @@
             <a:r>
               <a:rPr sz="2700" b="0" i="0">
                 <a:solidFill>
-                  <a:srgbClr val="B9C3D2"/>
+                  <a:srgbClr val="5A6B82"/>
                 </a:solidFill>
                 <a:latin typeface="DM Sans"/>
                 <a:ea typeface="DM Sans"/>
                 <a:cs typeface="DM Sans"/>
               </a:rPr>
-              <a:t>The story gets the question. Evidence answers it.</a:t>
+              <a:t>Often they just cannot see the pattern yet.</a:t>
             </a:r>
           </a:p>
         </p:txBody>
@@ -6165,7 +6856,7 @@
             <a:avLst/>
           </a:prstGeom>
           <a:solidFill>
-            <a:srgbClr val="F5F1E8"/>
+            <a:srgbClr val="112345"/>
           </a:solidFill>
           <a:ln>
             <a:noFill/>
@@ -6202,7 +6893,7 @@
         </p:nvSpPr>
         <p:spPr>
           <a:xfrm>
-            <a:off x="1016000" y="1066800"/>
+            <a:off x="1016000" y="2320988"/>
             <a:ext cx="10160000" cy="1524000"/>
           </a:xfrm>
           <a:prstGeom prst="rect">
@@ -6218,118 +6909,45 @@
           <a:p>
             <a:pPr algn="l">
               <a:lnSpc>
-                <a:spcPct val="100000"/>
+                <a:spcPct val="112000"/>
               </a:lnSpc>
             </a:pPr>
             <a:r>
-              <a:rPr sz="1500" b="1" i="0" spc="250">
+              <a:rPr sz="4600" b="1" i="0">
                 <a:solidFill>
-                  <a:srgbClr val="C9A84C"/>
+                  <a:srgbClr val="F5F1E8"/>
                 </a:solidFill>
                 <a:latin typeface="Montserrat"/>
                 <a:ea typeface="Montserrat"/>
                 <a:cs typeface="Montserrat"/>
               </a:rPr>
-              <a:t>YOU NOW HAVE ALL THREE</a:t>
-            </a:r>
-          </a:p>
-        </p:txBody>
-      </p:sp>
-      <p:sp>
-        <p:nvSpPr>
-          <p:cNvPr id="4" name="Rectangle 3"/>
-          <p:cNvSpPr/>
-          <p:nvPr/>
-        </p:nvSpPr>
-        <p:spPr>
-          <a:xfrm>
-            <a:off x="1016000" y="1422400"/>
-            <a:ext cx="762000" cy="25400"/>
-          </a:xfrm>
-          <a:prstGeom prst="rect">
-            <a:avLst/>
-          </a:prstGeom>
-          <a:solidFill>
-            <a:srgbClr val="C9A84C"/>
-          </a:solidFill>
-          <a:ln>
-            <a:noFill/>
-          </a:ln>
-          <a:effectLst/>
-        </p:spPr>
-        <p:style>
-          <a:lnRef idx="1">
-            <a:schemeClr val="accent1"/>
-          </a:lnRef>
-          <a:fillRef idx="3">
-            <a:schemeClr val="accent1"/>
-          </a:fillRef>
-          <a:effectRef idx="2">
-            <a:schemeClr val="accent1"/>
-          </a:effectRef>
-          <a:fontRef idx="minor">
-            <a:schemeClr val="lt1"/>
-          </a:fontRef>
-        </p:style>
-        <p:txBody>
-          <a:bodyPr rtlCol="0" anchor="ctr"/>
-          <a:lstStyle/>
-          <a:p>
-            <a:pPr algn="ctr"/>
-          </a:p>
-        </p:txBody>
-      </p:sp>
-      <p:sp>
-        <p:nvSpPr>
-          <p:cNvPr id="5" name="TextBox 4"/>
-          <p:cNvSpPr txBox="1"/>
-          <p:nvPr/>
-        </p:nvSpPr>
-        <p:spPr>
-          <a:xfrm>
-            <a:off x="1016000" y="2074037"/>
-            <a:ext cx="698500" cy="1524000"/>
-          </a:xfrm>
-          <a:prstGeom prst="rect">
-            <a:avLst/>
-          </a:prstGeom>
-          <a:noFill/>
-        </p:spPr>
-        <p:txBody>
-          <a:bodyPr wrap="square" lIns="0" rIns="0" tIns="0" bIns="0" anchor="t">
-            <a:spAutoFit/>
-          </a:bodyPr>
-          <a:lstStyle/>
-          <a:p>
-            <a:pPr algn="l">
-              <a:lnSpc>
-                <a:spcPct val="114000"/>
-              </a:lnSpc>
-            </a:pPr>
-            <a:r>
-              <a:rPr sz="2000" b="1" i="0" spc="75">
+              <a:t>A STORY EXPLAINS.</a:t>
+            </a:r>
+            <a:br/>
+            <a:r>
+              <a:rPr sz="4600" b="1" i="0">
                 <a:solidFill>
-                  <a:srgbClr val="C9A84C"/>
+                  <a:srgbClr val="F5F1E8"/>
                 </a:solidFill>
                 <a:latin typeface="Montserrat"/>
                 <a:ea typeface="Montserrat"/>
                 <a:cs typeface="Montserrat"/>
               </a:rPr>
-              <a:t>01</a:t>
-            </a:r>
-          </a:p>
-        </p:txBody>
-      </p:sp>
-      <p:sp>
-        <p:nvSpPr>
-          <p:cNvPr id="6" name="TextBox 5"/>
+              <a:t>PROOF SUPPORTS.</a:t>
+            </a:r>
+          </a:p>
+        </p:txBody>
+      </p:sp>
+      <p:sp>
+        <p:nvSpPr>
+          <p:cNvPr id="4" name="TextBox 3"/>
           <p:cNvSpPr txBox="1"/>
           <p:nvPr/>
         </p:nvSpPr>
         <p:spPr>
           <a:xfrm>
-            <a:off x="1854200" y="1997837"/>
-            <a:ext cx="9321800" cy="1524000"/>
+            <a:off x="1016000" y="3921696"/>
+            <a:ext cx="10160000" cy="1524000"/>
           </a:xfrm>
           <a:prstGeom prst="rect">
             <a:avLst/>
@@ -6344,224 +6962,19 @@
           <a:p>
             <a:pPr algn="l">
               <a:lnSpc>
-                <a:spcPct val="112000"/>
+                <a:spcPct val="135000"/>
               </a:lnSpc>
             </a:pPr>
             <a:r>
-              <a:rPr sz="3400" b="1" i="0">
+              <a:rPr sz="2700" b="0" i="0">
                 <a:solidFill>
-                  <a:srgbClr val="112345"/>
-                </a:solidFill>
-                <a:latin typeface="Montserrat"/>
-                <a:ea typeface="Montserrat"/>
-                <a:cs typeface="Montserrat"/>
-              </a:rPr>
-              <a:t>20 SECONDS</a:t>
-            </a:r>
-          </a:p>
-        </p:txBody>
-      </p:sp>
-      <p:sp>
-        <p:nvSpPr>
-          <p:cNvPr id="7" name="TextBox 6"/>
-          <p:cNvSpPr txBox="1"/>
-          <p:nvPr/>
-        </p:nvSpPr>
-        <p:spPr>
-          <a:xfrm>
-            <a:off x="1016000" y="2811653"/>
-            <a:ext cx="698500" cy="1524000"/>
-          </a:xfrm>
-          <a:prstGeom prst="rect">
-            <a:avLst/>
-          </a:prstGeom>
-          <a:noFill/>
-        </p:spPr>
-        <p:txBody>
-          <a:bodyPr wrap="square" lIns="0" rIns="0" tIns="0" bIns="0" anchor="t">
-            <a:spAutoFit/>
-          </a:bodyPr>
-          <a:lstStyle/>
-          <a:p>
-            <a:pPr algn="l">
-              <a:lnSpc>
-                <a:spcPct val="114000"/>
-              </a:lnSpc>
-            </a:pPr>
-            <a:r>
-              <a:rPr sz="2000" b="1" i="0" spc="75">
-                <a:solidFill>
-                  <a:srgbClr val="C9A84C"/>
-                </a:solidFill>
-                <a:latin typeface="Montserrat"/>
-                <a:ea typeface="Montserrat"/>
-                <a:cs typeface="Montserrat"/>
-              </a:rPr>
-              <a:t>02</a:t>
-            </a:r>
-          </a:p>
-        </p:txBody>
-      </p:sp>
-      <p:sp>
-        <p:nvSpPr>
-          <p:cNvPr id="8" name="TextBox 7"/>
-          <p:cNvSpPr txBox="1"/>
-          <p:nvPr/>
-        </p:nvSpPr>
-        <p:spPr>
-          <a:xfrm>
-            <a:off x="1854200" y="2735453"/>
-            <a:ext cx="9321800" cy="1524000"/>
-          </a:xfrm>
-          <a:prstGeom prst="rect">
-            <a:avLst/>
-          </a:prstGeom>
-          <a:noFill/>
-        </p:spPr>
-        <p:txBody>
-          <a:bodyPr wrap="square" lIns="0" rIns="0" tIns="0" bIns="0" anchor="t">
-            <a:spAutoFit/>
-          </a:bodyPr>
-          <a:lstStyle/>
-          <a:p>
-            <a:pPr algn="l">
-              <a:lnSpc>
-                <a:spcPct val="112000"/>
-              </a:lnSpc>
-            </a:pPr>
-            <a:r>
-              <a:rPr sz="3400" b="1" i="0">
-                <a:solidFill>
-                  <a:srgbClr val="112345"/>
-                </a:solidFill>
-                <a:latin typeface="Montserrat"/>
-                <a:ea typeface="Montserrat"/>
-                <a:cs typeface="Montserrat"/>
-              </a:rPr>
-              <a:t>90 SECONDS</a:t>
-            </a:r>
-          </a:p>
-        </p:txBody>
-      </p:sp>
-      <p:sp>
-        <p:nvSpPr>
-          <p:cNvPr id="9" name="TextBox 8"/>
-          <p:cNvSpPr txBox="1"/>
-          <p:nvPr/>
-        </p:nvSpPr>
-        <p:spPr>
-          <a:xfrm>
-            <a:off x="1016000" y="3549269"/>
-            <a:ext cx="698500" cy="1524000"/>
-          </a:xfrm>
-          <a:prstGeom prst="rect">
-            <a:avLst/>
-          </a:prstGeom>
-          <a:noFill/>
-        </p:spPr>
-        <p:txBody>
-          <a:bodyPr wrap="square" lIns="0" rIns="0" tIns="0" bIns="0" anchor="t">
-            <a:spAutoFit/>
-          </a:bodyPr>
-          <a:lstStyle/>
-          <a:p>
-            <a:pPr algn="l">
-              <a:lnSpc>
-                <a:spcPct val="114000"/>
-              </a:lnSpc>
-            </a:pPr>
-            <a:r>
-              <a:rPr sz="2000" b="1" i="0" spc="75">
-                <a:solidFill>
-                  <a:srgbClr val="C9A84C"/>
-                </a:solidFill>
-                <a:latin typeface="Montserrat"/>
-                <a:ea typeface="Montserrat"/>
-                <a:cs typeface="Montserrat"/>
-              </a:rPr>
-              <a:t>03</a:t>
-            </a:r>
-          </a:p>
-        </p:txBody>
-      </p:sp>
-      <p:sp>
-        <p:nvSpPr>
-          <p:cNvPr id="10" name="TextBox 9"/>
-          <p:cNvSpPr txBox="1"/>
-          <p:nvPr/>
-        </p:nvSpPr>
-        <p:spPr>
-          <a:xfrm>
-            <a:off x="1854200" y="3473069"/>
-            <a:ext cx="9321800" cy="1524000"/>
-          </a:xfrm>
-          <a:prstGeom prst="rect">
-            <a:avLst/>
-          </a:prstGeom>
-          <a:noFill/>
-        </p:spPr>
-        <p:txBody>
-          <a:bodyPr wrap="square" lIns="0" rIns="0" tIns="0" bIns="0" anchor="t">
-            <a:spAutoFit/>
-          </a:bodyPr>
-          <a:lstStyle/>
-          <a:p>
-            <a:pPr algn="l">
-              <a:lnSpc>
-                <a:spcPct val="112000"/>
-              </a:lnSpc>
-            </a:pPr>
-            <a:r>
-              <a:rPr sz="3400" b="1" i="0">
-                <a:solidFill>
-                  <a:srgbClr val="112345"/>
-                </a:solidFill>
-                <a:latin typeface="Montserrat"/>
-                <a:ea typeface="Montserrat"/>
-                <a:cs typeface="Montserrat"/>
-              </a:rPr>
-              <a:t>THE OBJECTION</a:t>
-            </a:r>
-          </a:p>
-        </p:txBody>
-      </p:sp>
-      <p:sp>
-        <p:nvSpPr>
-          <p:cNvPr id="11" name="TextBox 10"/>
-          <p:cNvSpPr txBox="1"/>
-          <p:nvPr/>
-        </p:nvSpPr>
-        <p:spPr>
-          <a:xfrm>
-            <a:off x="1016000" y="4350385"/>
-            <a:ext cx="10160000" cy="1524000"/>
-          </a:xfrm>
-          <a:prstGeom prst="rect">
-            <a:avLst/>
-          </a:prstGeom>
-          <a:noFill/>
-        </p:spPr>
-        <p:txBody>
-          <a:bodyPr wrap="square" lIns="0" rIns="0" tIns="0" bIns="0" anchor="t">
-            <a:spAutoFit/>
-          </a:bodyPr>
-          <a:lstStyle/>
-          <a:p>
-            <a:pPr algn="l">
-              <a:lnSpc>
-                <a:spcPct val="134000"/>
-              </a:lnSpc>
-            </a:pPr>
-            <a:r>
-              <a:rPr sz="2100" b="0" i="0">
-                <a:solidFill>
-                  <a:srgbClr val="5A6B82"/>
+                  <a:srgbClr val="B9C3D2"/>
                 </a:solidFill>
                 <a:latin typeface="DM Sans"/>
                 <a:ea typeface="DM Sans"/>
                 <a:cs typeface="DM Sans"/>
               </a:rPr>
-              <a:t>Say all three out loud before you need them.</a:t>
+              <a:t>The story gets the question. Evidence answers it.</a:t>
             </a:r>
           </a:p>
         </p:txBody>
@@ -6599,7 +7012,7 @@
             <a:avLst/>
           </a:prstGeom>
           <a:solidFill>
-            <a:srgbClr val="112345"/>
+            <a:srgbClr val="F5F1E8"/>
           </a:solidFill>
           <a:ln>
             <a:noFill/>
@@ -6630,23 +7043,64 @@
       </p:sp>
       <p:sp>
         <p:nvSpPr>
-          <p:cNvPr id="3" name="Rectangle 2"/>
+          <p:cNvPr id="3" name="TextBox 2"/>
+          <p:cNvSpPr txBox="1"/>
+          <p:nvPr/>
+        </p:nvSpPr>
+        <p:spPr>
+          <a:xfrm>
+            <a:off x="1016000" y="1066800"/>
+            <a:ext cx="10160000" cy="1524000"/>
+          </a:xfrm>
+          <a:prstGeom prst="rect">
+            <a:avLst/>
+          </a:prstGeom>
+          <a:noFill/>
+        </p:spPr>
+        <p:txBody>
+          <a:bodyPr wrap="square" lIns="0" rIns="0" tIns="0" bIns="0" anchor="t">
+            <a:spAutoFit/>
+          </a:bodyPr>
+          <a:lstStyle/>
+          <a:p>
+            <a:pPr algn="l">
+              <a:lnSpc>
+                <a:spcPct val="100000"/>
+              </a:lnSpc>
+            </a:pPr>
+            <a:r>
+              <a:rPr sz="1500" b="1" i="0" spc="250">
+                <a:solidFill>
+                  <a:srgbClr val="C9A84C"/>
+                </a:solidFill>
+                <a:latin typeface="Montserrat"/>
+                <a:ea typeface="Montserrat"/>
+                <a:cs typeface="Montserrat"/>
+              </a:rPr>
+              <a:t>YOU NOW HAVE ALL THREE</a:t>
+            </a:r>
+          </a:p>
+        </p:txBody>
+      </p:sp>
+      <p:sp>
+        <p:nvSpPr>
+          <p:cNvPr id="4" name="Rectangle 3"/>
           <p:cNvSpPr/>
           <p:nvPr/>
         </p:nvSpPr>
         <p:spPr>
           <a:xfrm>
-            <a:off x="1016000" y="990600"/>
-            <a:ext cx="215900" cy="215900"/>
-          </a:xfrm>
-          <a:prstGeom prst="rect">
-            <a:avLst/>
-          </a:prstGeom>
-          <a:noFill/>
-          <a:ln w="19050">
-            <a:solidFill>
-              <a:srgbClr val="C9A84C"/>
-            </a:solidFill>
+            <a:off x="1016000" y="1422400"/>
+            <a:ext cx="762000" cy="25400"/>
+          </a:xfrm>
+          <a:prstGeom prst="rect">
+            <a:avLst/>
+          </a:prstGeom>
+          <a:solidFill>
+            <a:srgbClr val="C9A84C"/>
+          </a:solidFill>
+          <a:ln>
+            <a:noFill/>
           </a:ln>
           <a:effectLst/>
         </p:spPr>
@@ -6674,146 +7128,14 @@
       </p:sp>
       <p:sp>
         <p:nvSpPr>
-          <p:cNvPr id="4" name="Rectangle 3"/>
-          <p:cNvSpPr/>
-          <p:nvPr/>
-        </p:nvSpPr>
-        <p:spPr>
-          <a:xfrm>
-            <a:off x="1289050" y="990600"/>
-            <a:ext cx="215900" cy="215900"/>
-          </a:xfrm>
-          <a:prstGeom prst="rect">
-            <a:avLst/>
-          </a:prstGeom>
-          <a:solidFill>
-            <a:srgbClr val="C1440E"/>
-          </a:solidFill>
-          <a:ln>
-            <a:noFill/>
-          </a:ln>
-          <a:effectLst/>
-        </p:spPr>
-        <p:style>
-          <a:lnRef idx="1">
-            <a:schemeClr val="accent1"/>
-          </a:lnRef>
-          <a:fillRef idx="3">
-            <a:schemeClr val="accent1"/>
-          </a:fillRef>
-          <a:effectRef idx="2">
-            <a:schemeClr val="accent1"/>
-          </a:effectRef>
-          <a:fontRef idx="minor">
-            <a:schemeClr val="lt1"/>
-          </a:fontRef>
-        </p:style>
-        <p:txBody>
-          <a:bodyPr rtlCol="0" anchor="ctr"/>
-          <a:lstStyle/>
-          <a:p>
-            <a:pPr algn="ctr"/>
-          </a:p>
-        </p:txBody>
-      </p:sp>
-      <p:sp>
-        <p:nvSpPr>
-          <p:cNvPr id="5" name="Rectangle 4"/>
-          <p:cNvSpPr/>
-          <p:nvPr/>
-        </p:nvSpPr>
-        <p:spPr>
-          <a:xfrm>
-            <a:off x="1016000" y="1263650"/>
-            <a:ext cx="215900" cy="215900"/>
-          </a:xfrm>
-          <a:prstGeom prst="rect">
-            <a:avLst/>
-          </a:prstGeom>
-          <a:noFill/>
-          <a:ln w="19050">
-            <a:solidFill>
-              <a:srgbClr val="C9A84C"/>
-            </a:solidFill>
-          </a:ln>
-          <a:effectLst/>
-        </p:spPr>
-        <p:style>
-          <a:lnRef idx="1">
-            <a:schemeClr val="accent1"/>
-          </a:lnRef>
-          <a:fillRef idx="3">
-            <a:schemeClr val="accent1"/>
-          </a:fillRef>
-          <a:effectRef idx="2">
-            <a:schemeClr val="accent1"/>
-          </a:effectRef>
-          <a:fontRef idx="minor">
-            <a:schemeClr val="lt1"/>
-          </a:fontRef>
-        </p:style>
-        <p:txBody>
-          <a:bodyPr rtlCol="0" anchor="ctr"/>
-          <a:lstStyle/>
-          <a:p>
-            <a:pPr algn="ctr"/>
-          </a:p>
-        </p:txBody>
-      </p:sp>
-      <p:sp>
-        <p:nvSpPr>
-          <p:cNvPr id="6" name="Rectangle 5"/>
-          <p:cNvSpPr/>
-          <p:nvPr/>
-        </p:nvSpPr>
-        <p:spPr>
-          <a:xfrm>
-            <a:off x="1289050" y="1263650"/>
-            <a:ext cx="215900" cy="215900"/>
-          </a:xfrm>
-          <a:prstGeom prst="rect">
-            <a:avLst/>
-          </a:prstGeom>
-          <a:noFill/>
-          <a:ln w="19050">
-            <a:solidFill>
-              <a:srgbClr val="C9A84C"/>
-            </a:solidFill>
-          </a:ln>
-          <a:effectLst/>
-        </p:spPr>
-        <p:style>
-          <a:lnRef idx="1">
-            <a:schemeClr val="accent1"/>
-          </a:lnRef>
-          <a:fillRef idx="3">
-            <a:schemeClr val="accent1"/>
-          </a:fillRef>
-          <a:effectRef idx="2">
-            <a:schemeClr val="accent1"/>
-          </a:effectRef>
-          <a:fontRef idx="minor">
-            <a:schemeClr val="lt1"/>
-          </a:fontRef>
-        </p:style>
-        <p:txBody>
-          <a:bodyPr rtlCol="0" anchor="ctr"/>
-          <a:lstStyle/>
-          <a:p>
-            <a:pPr algn="ctr"/>
-          </a:p>
-        </p:txBody>
-      </p:sp>
-      <p:sp>
-        <p:nvSpPr>
-          <p:cNvPr id="7" name="TextBox 6"/>
+          <p:cNvPr id="5" name="TextBox 4"/>
           <p:cNvSpPr txBox="1"/>
           <p:nvPr/>
         </p:nvSpPr>
         <p:spPr>
           <a:xfrm>
-            <a:off x="1016000" y="2036064"/>
-            <a:ext cx="10160000" cy="1524000"/>
+            <a:off x="1016000" y="2074037"/>
+            <a:ext cx="698500" cy="1524000"/>
           </a:xfrm>
           <a:prstGeom prst="rect">
             <a:avLst/>
@@ -6828,11 +7150,11 @@
           <a:p>
             <a:pPr algn="l">
               <a:lnSpc>
-                <a:spcPct val="100000"/>
+                <a:spcPct val="114000"/>
               </a:lnSpc>
             </a:pPr>
             <a:r>
-              <a:rPr sz="1500" b="1" i="0" spc="250">
+              <a:rPr sz="2000" b="1" i="0" spc="75">
                 <a:solidFill>
                   <a:srgbClr val="C9A84C"/>
                 </a:solidFill>
@@ -6840,21 +7162,21 @@
                 <a:ea typeface="Montserrat"/>
                 <a:cs typeface="Montserrat"/>
               </a:rPr>
-              <a:t>FREE 10-MINUTE CAREER EVIDENCE STARTER</a:t>
-            </a:r>
-          </a:p>
-        </p:txBody>
-      </p:sp>
-      <p:sp>
-        <p:nvSpPr>
-          <p:cNvPr id="8" name="TextBox 7"/>
+              <a:t>01</a:t>
+            </a:r>
+          </a:p>
+        </p:txBody>
+      </p:sp>
+      <p:sp>
+        <p:nvSpPr>
+          <p:cNvPr id="6" name="TextBox 5"/>
           <p:cNvSpPr txBox="1"/>
           <p:nvPr/>
         </p:nvSpPr>
         <p:spPr>
           <a:xfrm>
-            <a:off x="1016000" y="2455164"/>
-            <a:ext cx="10160000" cy="1524000"/>
+            <a:off x="1854200" y="1997837"/>
+            <a:ext cx="9321800" cy="1524000"/>
           </a:xfrm>
           <a:prstGeom prst="rect">
             <a:avLst/>
@@ -6873,41 +7195,29 @@
               </a:lnSpc>
             </a:pPr>
             <a:r>
-              <a:rPr sz="4200" b="1" i="0">
+              <a:rPr sz="3400" b="1" i="0">
                 <a:solidFill>
-                  <a:srgbClr val="F5F1E8"/>
+                  <a:srgbClr val="112345"/>
                 </a:solidFill>
                 <a:latin typeface="Montserrat"/>
                 <a:ea typeface="Montserrat"/>
                 <a:cs typeface="Montserrat"/>
               </a:rPr>
-              <a:t>Share your 20-second</a:t>
-            </a:r>
-            <a:br/>
-            <a:r>
-              <a:rPr sz="4200" b="1" i="0">
-                <a:solidFill>
-                  <a:srgbClr val="F5F1E8"/>
-                </a:solidFill>
-                <a:latin typeface="Montserrat"/>
-                <a:ea typeface="Montserrat"/>
-                <a:cs typeface="Montserrat"/>
-              </a:rPr>
-              <a:t>version in the comments.</a:t>
-            </a:r>
-          </a:p>
-        </p:txBody>
-      </p:sp>
-      <p:sp>
-        <p:nvSpPr>
-          <p:cNvPr id="9" name="TextBox 8"/>
+              <a:t>20 SECONDS</a:t>
+            </a:r>
+          </a:p>
+        </p:txBody>
+      </p:sp>
+      <p:sp>
+        <p:nvSpPr>
+          <p:cNvPr id="7" name="TextBox 6"/>
           <p:cNvSpPr txBox="1"/>
           <p:nvPr/>
         </p:nvSpPr>
         <p:spPr>
           <a:xfrm>
-            <a:off x="1016000" y="3916680"/>
-            <a:ext cx="10160000" cy="1524000"/>
+            <a:off x="1016000" y="2811653"/>
+            <a:ext cx="698500" cy="1524000"/>
           </a:xfrm>
           <a:prstGeom prst="rect">
             <a:avLst/>
@@ -6922,96 +7232,11 @@
           <a:p>
             <a:pPr algn="l">
               <a:lnSpc>
-                <a:spcPct val="134000"/>
+                <a:spcPct val="114000"/>
               </a:lnSpc>
             </a:pPr>
             <a:r>
-              <a:rPr sz="2200" b="0" i="0">
-                <a:solidFill>
-                  <a:srgbClr val="B9C3D2"/>
-                </a:solidFill>
-                <a:latin typeface="DM Sans"/>
-                <a:ea typeface="DM Sans"/>
-                <a:cs typeface="DM Sans"/>
-              </a:rPr>
-              <a:t>Building the proof underneath the story? Start here.</a:t>
-            </a:r>
-          </a:p>
-        </p:txBody>
-      </p:sp>
-      <p:sp>
-        <p:nvSpPr>
-          <p:cNvPr id="10" name="Rectangle 9"/>
-          <p:cNvSpPr/>
-          <p:nvPr/>
-        </p:nvSpPr>
-        <p:spPr>
-          <a:xfrm>
-            <a:off x="1016000" y="4633976"/>
-            <a:ext cx="762000" cy="25400"/>
-          </a:xfrm>
-          <a:prstGeom prst="rect">
-            <a:avLst/>
-          </a:prstGeom>
-          <a:solidFill>
-            <a:srgbClr val="C9A84C"/>
-          </a:solidFill>
-          <a:ln>
-            <a:noFill/>
-          </a:ln>
-          <a:effectLst/>
-        </p:spPr>
-        <p:style>
-          <a:lnRef idx="1">
-            <a:schemeClr val="accent1"/>
-          </a:lnRef>
-          <a:fillRef idx="3">
-            <a:schemeClr val="accent1"/>
-          </a:fillRef>
-          <a:effectRef idx="2">
-            <a:schemeClr val="accent1"/>
-          </a:effectRef>
-          <a:fontRef idx="minor">
-            <a:schemeClr val="lt1"/>
-          </a:fontRef>
-        </p:style>
-        <p:txBody>
-          <a:bodyPr rtlCol="0" anchor="ctr"/>
-          <a:lstStyle/>
-          <a:p>
-            <a:pPr algn="ctr"/>
-          </a:p>
-        </p:txBody>
-      </p:sp>
-      <p:sp>
-        <p:nvSpPr>
-          <p:cNvPr id="11" name="TextBox 10"/>
-          <p:cNvSpPr txBox="1"/>
-          <p:nvPr/>
-        </p:nvSpPr>
-        <p:spPr>
-          <a:xfrm>
-            <a:off x="1016000" y="4938776"/>
-            <a:ext cx="10160000" cy="1524000"/>
-          </a:xfrm>
-          <a:prstGeom prst="rect">
-            <a:avLst/>
-          </a:prstGeom>
-          <a:noFill/>
-        </p:spPr>
-        <p:txBody>
-          <a:bodyPr wrap="square" lIns="0" rIns="0" tIns="0" bIns="0" anchor="t">
-            <a:spAutoFit/>
-          </a:bodyPr>
-          <a:lstStyle/>
-          <a:p>
-            <a:pPr algn="l">
-              <a:lnSpc>
-                <a:spcPct val="120000"/>
-              </a:lnSpc>
-            </a:pPr>
-            <a:r>
-              <a:rPr sz="2400" b="1" i="0">
+              <a:rPr sz="2000" b="1" i="0" spc="75">
                 <a:solidFill>
                   <a:srgbClr val="C9A84C"/>
                 </a:solidFill>
@@ -7019,7 +7244,171 @@
                 <a:ea typeface="Montserrat"/>
                 <a:cs typeface="Montserrat"/>
               </a:rPr>
-              <a:t>temidayoafonja.com/career-evidence-starter</a:t>
+              <a:t>02</a:t>
+            </a:r>
+          </a:p>
+        </p:txBody>
+      </p:sp>
+      <p:sp>
+        <p:nvSpPr>
+          <p:cNvPr id="8" name="TextBox 7"/>
+          <p:cNvSpPr txBox="1"/>
+          <p:nvPr/>
+        </p:nvSpPr>
+        <p:spPr>
+          <a:xfrm>
+            <a:off x="1854200" y="2735453"/>
+            <a:ext cx="9321800" cy="1524000"/>
+          </a:xfrm>
+          <a:prstGeom prst="rect">
+            <a:avLst/>
+          </a:prstGeom>
+          <a:noFill/>
+        </p:spPr>
+        <p:txBody>
+          <a:bodyPr wrap="square" lIns="0" rIns="0" tIns="0" bIns="0" anchor="t">
+            <a:spAutoFit/>
+          </a:bodyPr>
+          <a:lstStyle/>
+          <a:p>
+            <a:pPr algn="l">
+              <a:lnSpc>
+                <a:spcPct val="112000"/>
+              </a:lnSpc>
+            </a:pPr>
+            <a:r>
+              <a:rPr sz="3400" b="1" i="0">
+                <a:solidFill>
+                  <a:srgbClr val="112345"/>
+                </a:solidFill>
+                <a:latin typeface="Montserrat"/>
+                <a:ea typeface="Montserrat"/>
+                <a:cs typeface="Montserrat"/>
+              </a:rPr>
+              <a:t>90 SECONDS</a:t>
+            </a:r>
+          </a:p>
+        </p:txBody>
+      </p:sp>
+      <p:sp>
+        <p:nvSpPr>
+          <p:cNvPr id="9" name="TextBox 8"/>
+          <p:cNvSpPr txBox="1"/>
+          <p:nvPr/>
+        </p:nvSpPr>
+        <p:spPr>
+          <a:xfrm>
+            <a:off x="1016000" y="3549269"/>
+            <a:ext cx="698500" cy="1524000"/>
+          </a:xfrm>
+          <a:prstGeom prst="rect">
+            <a:avLst/>
+          </a:prstGeom>
+          <a:noFill/>
+        </p:spPr>
+        <p:txBody>
+          <a:bodyPr wrap="square" lIns="0" rIns="0" tIns="0" bIns="0" anchor="t">
+            <a:spAutoFit/>
+          </a:bodyPr>
+          <a:lstStyle/>
+          <a:p>
+            <a:pPr algn="l">
+              <a:lnSpc>
+                <a:spcPct val="114000"/>
+              </a:lnSpc>
+            </a:pPr>
+            <a:r>
+              <a:rPr sz="2000" b="1" i="0" spc="75">
+                <a:solidFill>
+                  <a:srgbClr val="C9A84C"/>
+                </a:solidFill>
+                <a:latin typeface="Montserrat"/>
+                <a:ea typeface="Montserrat"/>
+                <a:cs typeface="Montserrat"/>
+              </a:rPr>
+              <a:t>03</a:t>
+            </a:r>
+          </a:p>
+        </p:txBody>
+      </p:sp>
+      <p:sp>
+        <p:nvSpPr>
+          <p:cNvPr id="10" name="TextBox 9"/>
+          <p:cNvSpPr txBox="1"/>
+          <p:nvPr/>
+        </p:nvSpPr>
+        <p:spPr>
+          <a:xfrm>
+            <a:off x="1854200" y="3473069"/>
+            <a:ext cx="9321800" cy="1524000"/>
+          </a:xfrm>
+          <a:prstGeom prst="rect">
+            <a:avLst/>
+          </a:prstGeom>
+          <a:noFill/>
+        </p:spPr>
+        <p:txBody>
+          <a:bodyPr wrap="square" lIns="0" rIns="0" tIns="0" bIns="0" anchor="t">
+            <a:spAutoFit/>
+          </a:bodyPr>
+          <a:lstStyle/>
+          <a:p>
+            <a:pPr algn="l">
+              <a:lnSpc>
+                <a:spcPct val="112000"/>
+              </a:lnSpc>
+            </a:pPr>
+            <a:r>
+              <a:rPr sz="3400" b="1" i="0">
+                <a:solidFill>
+                  <a:srgbClr val="112345"/>
+                </a:solidFill>
+                <a:latin typeface="Montserrat"/>
+                <a:ea typeface="Montserrat"/>
+                <a:cs typeface="Montserrat"/>
+              </a:rPr>
+              <a:t>THE OBJECTION</a:t>
+            </a:r>
+          </a:p>
+        </p:txBody>
+      </p:sp>
+      <p:sp>
+        <p:nvSpPr>
+          <p:cNvPr id="11" name="TextBox 10"/>
+          <p:cNvSpPr txBox="1"/>
+          <p:nvPr/>
+        </p:nvSpPr>
+        <p:spPr>
+          <a:xfrm>
+            <a:off x="1016000" y="4350385"/>
+            <a:ext cx="10160000" cy="1524000"/>
+          </a:xfrm>
+          <a:prstGeom prst="rect">
+            <a:avLst/>
+          </a:prstGeom>
+          <a:noFill/>
+        </p:spPr>
+        <p:txBody>
+          <a:bodyPr wrap="square" lIns="0" rIns="0" tIns="0" bIns="0" anchor="t">
+            <a:spAutoFit/>
+          </a:bodyPr>
+          <a:lstStyle/>
+          <a:p>
+            <a:pPr algn="l">
+              <a:lnSpc>
+                <a:spcPct val="134000"/>
+              </a:lnSpc>
+            </a:pPr>
+            <a:r>
+              <a:rPr sz="2100" b="0" i="0">
+                <a:solidFill>
+                  <a:srgbClr val="5A6B82"/>
+                </a:solidFill>
+                <a:latin typeface="DM Sans"/>
+                <a:ea typeface="DM Sans"/>
+                <a:cs typeface="DM Sans"/>
+              </a:rPr>
+              <a:t>Say all three out loud before you need them.</a:t>
             </a:r>
           </a:p>
         </p:txBody>
@@ -7088,64 +7477,23 @@
       </p:sp>
       <p:sp>
         <p:nvSpPr>
-          <p:cNvPr id="3" name="TextBox 2"/>
-          <p:cNvSpPr txBox="1"/>
-          <p:nvPr/>
-        </p:nvSpPr>
-        <p:spPr>
-          <a:xfrm>
-            <a:off x="1016000" y="2245868"/>
-            <a:ext cx="5461000" cy="1524000"/>
-          </a:xfrm>
-          <a:prstGeom prst="rect">
-            <a:avLst/>
-          </a:prstGeom>
-          <a:noFill/>
-        </p:spPr>
-        <p:txBody>
-          <a:bodyPr wrap="square" lIns="0" rIns="0" tIns="0" bIns="0" anchor="t">
-            <a:spAutoFit/>
-          </a:bodyPr>
-          <a:lstStyle/>
-          <a:p>
-            <a:pPr algn="l">
-              <a:lnSpc>
-                <a:spcPct val="100000"/>
-              </a:lnSpc>
-            </a:pPr>
-            <a:r>
-              <a:rPr sz="1500" b="1" i="0" spc="250">
-                <a:solidFill>
-                  <a:srgbClr val="C9A84C"/>
-                </a:solidFill>
-                <a:latin typeface="Montserrat"/>
-                <a:ea typeface="Montserrat"/>
-                <a:cs typeface="Montserrat"/>
-              </a:rPr>
-              <a:t>WATCH NEXT</a:t>
-            </a:r>
-          </a:p>
-        </p:txBody>
-      </p:sp>
-      <p:sp>
-        <p:nvSpPr>
-          <p:cNvPr id="4" name="Rectangle 3"/>
+          <p:cNvPr id="3" name="Rectangle 2"/>
           <p:cNvSpPr/>
           <p:nvPr/>
         </p:nvSpPr>
         <p:spPr>
           <a:xfrm>
-            <a:off x="1016000" y="2626868"/>
-            <a:ext cx="762000" cy="25400"/>
-          </a:xfrm>
-          <a:prstGeom prst="rect">
-            <a:avLst/>
-          </a:prstGeom>
-          <a:solidFill>
-            <a:srgbClr val="C9A84C"/>
-          </a:solidFill>
-          <a:ln>
-            <a:noFill/>
+            <a:off x="1016000" y="990600"/>
+            <a:ext cx="215900" cy="215900"/>
+          </a:xfrm>
+          <a:prstGeom prst="rect">
+            <a:avLst/>
+          </a:prstGeom>
+          <a:noFill/>
+          <a:ln w="19050">
+            <a:solidFill>
+              <a:srgbClr val="C9A84C"/>
+            </a:solidFill>
           </a:ln>
           <a:effectLst/>
         </p:spPr>
@@ -7173,14 +7521,146 @@
       </p:sp>
       <p:sp>
         <p:nvSpPr>
-          <p:cNvPr id="5" name="TextBox 4"/>
+          <p:cNvPr id="4" name="Rectangle 3"/>
+          <p:cNvSpPr/>
+          <p:nvPr/>
+        </p:nvSpPr>
+        <p:spPr>
+          <a:xfrm>
+            <a:off x="1289050" y="990600"/>
+            <a:ext cx="215900" cy="215900"/>
+          </a:xfrm>
+          <a:prstGeom prst="rect">
+            <a:avLst/>
+          </a:prstGeom>
+          <a:solidFill>
+            <a:srgbClr val="C1440E"/>
+          </a:solidFill>
+          <a:ln>
+            <a:noFill/>
+          </a:ln>
+          <a:effectLst/>
+        </p:spPr>
+        <p:style>
+          <a:lnRef idx="1">
+            <a:schemeClr val="accent1"/>
+          </a:lnRef>
+          <a:fillRef idx="3">
+            <a:schemeClr val="accent1"/>
+          </a:fillRef>
+          <a:effectRef idx="2">
+            <a:schemeClr val="accent1"/>
+          </a:effectRef>
+          <a:fontRef idx="minor">
+            <a:schemeClr val="lt1"/>
+          </a:fontRef>
+        </p:style>
+        <p:txBody>
+          <a:bodyPr rtlCol="0" anchor="ctr"/>
+          <a:lstStyle/>
+          <a:p>
+            <a:pPr algn="ctr"/>
+          </a:p>
+        </p:txBody>
+      </p:sp>
+      <p:sp>
+        <p:nvSpPr>
+          <p:cNvPr id="5" name="Rectangle 4"/>
+          <p:cNvSpPr/>
+          <p:nvPr/>
+        </p:nvSpPr>
+        <p:spPr>
+          <a:xfrm>
+            <a:off x="1016000" y="1263650"/>
+            <a:ext cx="215900" cy="215900"/>
+          </a:xfrm>
+          <a:prstGeom prst="rect">
+            <a:avLst/>
+          </a:prstGeom>
+          <a:noFill/>
+          <a:ln w="19050">
+            <a:solidFill>
+              <a:srgbClr val="C9A84C"/>
+            </a:solidFill>
+          </a:ln>
+          <a:effectLst/>
+        </p:spPr>
+        <p:style>
+          <a:lnRef idx="1">
+            <a:schemeClr val="accent1"/>
+          </a:lnRef>
+          <a:fillRef idx="3">
+            <a:schemeClr val="accent1"/>
+          </a:fillRef>
+          <a:effectRef idx="2">
+            <a:schemeClr val="accent1"/>
+          </a:effectRef>
+          <a:fontRef idx="minor">
+            <a:schemeClr val="lt1"/>
+          </a:fontRef>
+        </p:style>
+        <p:txBody>
+          <a:bodyPr rtlCol="0" anchor="ctr"/>
+          <a:lstStyle/>
+          <a:p>
+            <a:pPr algn="ctr"/>
+          </a:p>
+        </p:txBody>
+      </p:sp>
+      <p:sp>
+        <p:nvSpPr>
+          <p:cNvPr id="6" name="Rectangle 5"/>
+          <p:cNvSpPr/>
+          <p:nvPr/>
+        </p:nvSpPr>
+        <p:spPr>
+          <a:xfrm>
+            <a:off x="1289050" y="1263650"/>
+            <a:ext cx="215900" cy="215900"/>
+          </a:xfrm>
+          <a:prstGeom prst="rect">
+            <a:avLst/>
+          </a:prstGeom>
+          <a:noFill/>
+          <a:ln w="19050">
+            <a:solidFill>
+              <a:srgbClr val="C9A84C"/>
+            </a:solidFill>
+          </a:ln>
+          <a:effectLst/>
+        </p:spPr>
+        <p:style>
+          <a:lnRef idx="1">
+            <a:schemeClr val="accent1"/>
+          </a:lnRef>
+          <a:fillRef idx="3">
+            <a:schemeClr val="accent1"/>
+          </a:fillRef>
+          <a:effectRef idx="2">
+            <a:schemeClr val="accent1"/>
+          </a:effectRef>
+          <a:fontRef idx="minor">
+            <a:schemeClr val="lt1"/>
+          </a:fontRef>
+        </p:style>
+        <p:txBody>
+          <a:bodyPr rtlCol="0" anchor="ctr"/>
+          <a:lstStyle/>
+          <a:p>
+            <a:pPr algn="ctr"/>
+          </a:p>
+        </p:txBody>
+      </p:sp>
+      <p:sp>
+        <p:nvSpPr>
+          <p:cNvPr id="7" name="TextBox 6"/>
           <p:cNvSpPr txBox="1"/>
           <p:nvPr/>
         </p:nvSpPr>
         <p:spPr>
           <a:xfrm>
-            <a:off x="1016000" y="2957068"/>
-            <a:ext cx="5461000" cy="1524000"/>
+            <a:off x="1016000" y="2036064"/>
+            <a:ext cx="10160000" cy="1524000"/>
           </a:xfrm>
           <a:prstGeom prst="rect">
             <a:avLst/>
@@ -7195,11 +7675,52 @@
           <a:p>
             <a:pPr algn="l">
               <a:lnSpc>
-                <a:spcPct val="116000"/>
+                <a:spcPct val="100000"/>
               </a:lnSpc>
             </a:pPr>
             <a:r>
-              <a:rPr sz="3400" b="1" i="0">
+              <a:rPr sz="1500" b="1" i="0" spc="250">
+                <a:solidFill>
+                  <a:srgbClr val="C9A84C"/>
+                </a:solidFill>
+                <a:latin typeface="Montserrat"/>
+                <a:ea typeface="Montserrat"/>
+                <a:cs typeface="Montserrat"/>
+              </a:rPr>
+              <a:t>FREE 10-MINUTE CAREER EVIDENCE STARTER</a:t>
+            </a:r>
+          </a:p>
+        </p:txBody>
+      </p:sp>
+      <p:sp>
+        <p:nvSpPr>
+          <p:cNvPr id="8" name="TextBox 7"/>
+          <p:cNvSpPr txBox="1"/>
+          <p:nvPr/>
+        </p:nvSpPr>
+        <p:spPr>
+          <a:xfrm>
+            <a:off x="1016000" y="2455164"/>
+            <a:ext cx="10160000" cy="1524000"/>
+          </a:xfrm>
+          <a:prstGeom prst="rect">
+            <a:avLst/>
+          </a:prstGeom>
+          <a:noFill/>
+        </p:spPr>
+        <p:txBody>
+          <a:bodyPr wrap="square" lIns="0" rIns="0" tIns="0" bIns="0" anchor="t">
+            <a:spAutoFit/>
+          </a:bodyPr>
+          <a:lstStyle/>
+          <a:p>
+            <a:pPr algn="l">
+              <a:lnSpc>
+                <a:spcPct val="112000"/>
+              </a:lnSpc>
+            </a:pPr>
+            <a:r>
+              <a:rPr sz="4200" b="1" i="0">
                 <a:solidFill>
                   <a:srgbClr val="F5F1E8"/>
                 </a:solidFill>
@@ -7207,11 +7728,11 @@
                 <a:ea typeface="Montserrat"/>
                 <a:cs typeface="Montserrat"/>
               </a:rPr>
-              <a:t>Why Nobody Can Tell</a:t>
+              <a:t>Share your 20-second</a:t>
             </a:r>
             <a:br/>
             <a:r>
-              <a:rPr sz="3400" b="1" i="0">
+              <a:rPr sz="4200" b="1" i="0">
                 <a:solidFill>
                   <a:srgbClr val="F5F1E8"/>
                 </a:solidFill>
@@ -7219,19 +7740,133 @@
                 <a:ea typeface="Montserrat"/>
                 <a:cs typeface="Montserrat"/>
               </a:rPr>
-              <a:t>What You're</a:t>
-            </a:r>
-            <a:br/>
-            <a:r>
-              <a:rPr sz="3400" b="1" i="0">
+              <a:t>version in the comments.</a:t>
+            </a:r>
+          </a:p>
+        </p:txBody>
+      </p:sp>
+      <p:sp>
+        <p:nvSpPr>
+          <p:cNvPr id="9" name="TextBox 8"/>
+          <p:cNvSpPr txBox="1"/>
+          <p:nvPr/>
+        </p:nvSpPr>
+        <p:spPr>
+          <a:xfrm>
+            <a:off x="1016000" y="3916680"/>
+            <a:ext cx="10160000" cy="1524000"/>
+          </a:xfrm>
+          <a:prstGeom prst="rect">
+            <a:avLst/>
+          </a:prstGeom>
+          <a:noFill/>
+        </p:spPr>
+        <p:txBody>
+          <a:bodyPr wrap="square" lIns="0" rIns="0" tIns="0" bIns="0" anchor="t">
+            <a:spAutoFit/>
+          </a:bodyPr>
+          <a:lstStyle/>
+          <a:p>
+            <a:pPr algn="l">
+              <a:lnSpc>
+                <a:spcPct val="134000"/>
+              </a:lnSpc>
+            </a:pPr>
+            <a:r>
+              <a:rPr sz="2200" b="0" i="0">
                 <a:solidFill>
-                  <a:srgbClr val="F5F1E8"/>
+                  <a:srgbClr val="B9C3D2"/>
+                </a:solidFill>
+                <a:latin typeface="DM Sans"/>
+                <a:ea typeface="DM Sans"/>
+                <a:cs typeface="DM Sans"/>
+              </a:rPr>
+              <a:t>Building the proof underneath the story? Start here.</a:t>
+            </a:r>
+          </a:p>
+        </p:txBody>
+      </p:sp>
+      <p:sp>
+        <p:nvSpPr>
+          <p:cNvPr id="10" name="Rectangle 9"/>
+          <p:cNvSpPr/>
+          <p:nvPr/>
+        </p:nvSpPr>
+        <p:spPr>
+          <a:xfrm>
+            <a:off x="1016000" y="4633976"/>
+            <a:ext cx="762000" cy="25400"/>
+          </a:xfrm>
+          <a:prstGeom prst="rect">
+            <a:avLst/>
+          </a:prstGeom>
+          <a:solidFill>
+            <a:srgbClr val="C9A84C"/>
+          </a:solidFill>
+          <a:ln>
+            <a:noFill/>
+          </a:ln>
+          <a:effectLst/>
+        </p:spPr>
+        <p:style>
+          <a:lnRef idx="1">
+            <a:schemeClr val="accent1"/>
+          </a:lnRef>
+          <a:fillRef idx="3">
+            <a:schemeClr val="accent1"/>
+          </a:fillRef>
+          <a:effectRef idx="2">
+            <a:schemeClr val="accent1"/>
+          </a:effectRef>
+          <a:fontRef idx="minor">
+            <a:schemeClr val="lt1"/>
+          </a:fontRef>
+        </p:style>
+        <p:txBody>
+          <a:bodyPr rtlCol="0" anchor="ctr"/>
+          <a:lstStyle/>
+          <a:p>
+            <a:pPr algn="ctr"/>
+          </a:p>
+        </p:txBody>
+      </p:sp>
+      <p:sp>
+        <p:nvSpPr>
+          <p:cNvPr id="11" name="TextBox 10"/>
+          <p:cNvSpPr txBox="1"/>
+          <p:nvPr/>
+        </p:nvSpPr>
+        <p:spPr>
+          <a:xfrm>
+            <a:off x="1016000" y="4938776"/>
+            <a:ext cx="10160000" cy="1524000"/>
+          </a:xfrm>
+          <a:prstGeom prst="rect">
+            <a:avLst/>
+          </a:prstGeom>
+          <a:noFill/>
+        </p:spPr>
+        <p:txBody>
+          <a:bodyPr wrap="square" lIns="0" rIns="0" tIns="0" bIns="0" anchor="t">
+            <a:spAutoFit/>
+          </a:bodyPr>
+          <a:lstStyle/>
+          <a:p>
+            <a:pPr algn="l">
+              <a:lnSpc>
+                <a:spcPct val="120000"/>
+              </a:lnSpc>
+            </a:pPr>
+            <a:r>
+              <a:rPr sz="2400" b="1" i="0">
+                <a:solidFill>
+                  <a:srgbClr val="C9A84C"/>
                 </a:solidFill>
                 <a:latin typeface="Montserrat"/>
                 <a:ea typeface="Montserrat"/>
                 <a:cs typeface="Montserrat"/>
               </a:rPr>
-              <a:t>Actually Good At</a:t>
+              <a:t>temidayoafonja.com/career-evidence-starter</a:t>
             </a:r>
           </a:p>
         </p:txBody>
